--- a/docs/PFE/dossier/kordo-presentation.pptx
+++ b/docs/PFE/dossier/kordo-presentation.pptx
@@ -5,28 +5,28 @@
     <p:sldMasterId id="2147483648" r:id="rId1"/>
   </p:sldMasterIdLst>
   <p:sldIdLst>
-    <p:sldId id="256" r:id="rId7"/>
-    <p:sldId id="257" r:id="rId8"/>
-    <p:sldId id="258" r:id="rId9"/>
-    <p:sldId id="259" r:id="rId10"/>
-    <p:sldId id="260" r:id="rId11"/>
-    <p:sldId id="261" r:id="rId12"/>
-    <p:sldId id="262" r:id="rId13"/>
-    <p:sldId id="263" r:id="rId14"/>
-    <p:sldId id="264" r:id="rId15"/>
-    <p:sldId id="265" r:id="rId16"/>
-    <p:sldId id="266" r:id="rId17"/>
-    <p:sldId id="267" r:id="rId18"/>
-    <p:sldId id="268" r:id="rId19"/>
-    <p:sldId id="269" r:id="rId20"/>
-    <p:sldId id="270" r:id="rId21"/>
-    <p:sldId id="271" r:id="rId22"/>
-    <p:sldId id="272" r:id="rId23"/>
-    <p:sldId id="273" r:id="rId24"/>
-    <p:sldId id="274" r:id="rId25"/>
-    <p:sldId id="275" r:id="rId26"/>
+    <p:sldId id="256" r:id="rId2"/>
+    <p:sldId id="257" r:id="rId3"/>
+    <p:sldId id="258" r:id="rId4"/>
+    <p:sldId id="259" r:id="rId5"/>
+    <p:sldId id="260" r:id="rId6"/>
+    <p:sldId id="261" r:id="rId7"/>
+    <p:sldId id="262" r:id="rId8"/>
+    <p:sldId id="263" r:id="rId9"/>
+    <p:sldId id="264" r:id="rId10"/>
+    <p:sldId id="265" r:id="rId11"/>
+    <p:sldId id="266" r:id="rId12"/>
+    <p:sldId id="267" r:id="rId13"/>
+    <p:sldId id="268" r:id="rId14"/>
+    <p:sldId id="269" r:id="rId15"/>
+    <p:sldId id="270" r:id="rId16"/>
+    <p:sldId id="271" r:id="rId17"/>
+    <p:sldId id="272" r:id="rId18"/>
+    <p:sldId id="273" r:id="rId19"/>
+    <p:sldId id="274" r:id="rId20"/>
+    <p:sldId id="275" r:id="rId21"/>
   </p:sldIdLst>
-  <p:sldSz cx="12191695" cy="6858000" type="screen4x3"/>
+  <p:sldSz cx="12192000" cy="6858000"/>
   <p:notesSz cx="6858000" cy="9144000"/>
   <p:defaultTextStyle>
     <a:defPPr>
@@ -123,6 +123,22 @@
       </a:defRPr>
     </a:lvl9pPr>
   </p:defaultTextStyle>
+  <p:extLst>
+    <p:ext uri="{EFAFB233-063F-42B5-8137-9DF3F51BA10A}">
+      <p15:sldGuideLst xmlns:p15="http://schemas.microsoft.com/office/powerpoint/2012/main">
+        <p15:guide id="1" orient="horz" pos="2160">
+          <p15:clr>
+            <a:srgbClr val="A4A3A4"/>
+          </p15:clr>
+        </p15:guide>
+        <p15:guide id="2" pos="2880">
+          <p15:clr>
+            <a:srgbClr val="A4A3A4"/>
+          </p15:clr>
+        </p15:guide>
+      </p15:sldGuideLst>
+    </p:ext>
+  </p:extLst>
 </p:presentation>
 </file>
 
@@ -164,10 +180,9 @@
           <a:lstStyle/>
           <a:p>
             <a:r>
-              <a:rPr lang="en-US" smtClean="0"/>
+              <a:rPr lang="en-US"/>
               <a:t>Click to edit Master title style</a:t>
             </a:r>
-            <a:endParaRPr lang="en-US"/>
           </a:p>
         </p:txBody>
       </p:sp>
@@ -283,10 +298,9 @@
           </a:lstStyle>
           <a:p>
             <a:r>
-              <a:rPr lang="en-US" smtClean="0"/>
+              <a:rPr lang="en-US"/>
               <a:t>Click to edit Master subtitle style</a:t>
             </a:r>
-            <a:endParaRPr lang="en-US"/>
           </a:p>
         </p:txBody>
       </p:sp>
@@ -307,7 +321,7 @@
           <a:p>
             <a:fld id="{5BCAD085-E8A6-8845-BD4E-CB4CCA059FC4}" type="datetimeFigureOut">
               <a:rPr lang="en-US" smtClean="0"/>
-              <a:t>1/27/13</a:t>
+              <a:t>6/16/2026</a:t>
             </a:fld>
             <a:endParaRPr lang="en-US"/>
           </a:p>
@@ -349,7 +363,7 @@
           <a:p>
             <a:fld id="{C1FF6DA9-008F-8B48-92A6-B652298478BF}" type="slidenum">
               <a:rPr lang="en-US" smtClean="0"/>
-              <a:t>‹#›</a:t>
+              <a:t>‹N°›</a:t>
             </a:fld>
             <a:endParaRPr lang="en-US"/>
           </a:p>
@@ -401,10 +415,9 @@
           <a:lstStyle/>
           <a:p>
             <a:r>
-              <a:rPr lang="en-US" smtClean="0"/>
+              <a:rPr lang="en-US"/>
               <a:t>Click to edit Master title style</a:t>
             </a:r>
-            <a:endParaRPr lang="en-US"/>
           </a:p>
         </p:txBody>
       </p:sp>
@@ -425,38 +438,37 @@
           <a:p>
             <a:pPr lvl="0"/>
             <a:r>
-              <a:rPr lang="en-US" smtClean="0"/>
+              <a:rPr lang="en-US"/>
               <a:t>Click to edit Master text styles</a:t>
             </a:r>
           </a:p>
           <a:p>
             <a:pPr lvl="1"/>
             <a:r>
-              <a:rPr lang="en-US" smtClean="0"/>
+              <a:rPr lang="en-US"/>
               <a:t>Second level</a:t>
             </a:r>
           </a:p>
           <a:p>
             <a:pPr lvl="2"/>
             <a:r>
-              <a:rPr lang="en-US" smtClean="0"/>
+              <a:rPr lang="en-US"/>
               <a:t>Third level</a:t>
             </a:r>
           </a:p>
           <a:p>
             <a:pPr lvl="3"/>
             <a:r>
-              <a:rPr lang="en-US" smtClean="0"/>
+              <a:rPr lang="en-US"/>
               <a:t>Fourth level</a:t>
             </a:r>
           </a:p>
           <a:p>
             <a:pPr lvl="4"/>
             <a:r>
-              <a:rPr lang="en-US" smtClean="0"/>
+              <a:rPr lang="en-US"/>
               <a:t>Fifth level</a:t>
             </a:r>
-            <a:endParaRPr lang="en-US"/>
           </a:p>
         </p:txBody>
       </p:sp>
@@ -477,7 +489,7 @@
           <a:p>
             <a:fld id="{5BCAD085-E8A6-8845-BD4E-CB4CCA059FC4}" type="datetimeFigureOut">
               <a:rPr lang="en-US" smtClean="0"/>
-              <a:t>1/27/13</a:t>
+              <a:t>6/16/2026</a:t>
             </a:fld>
             <a:endParaRPr lang="en-US"/>
           </a:p>
@@ -519,7 +531,7 @@
           <a:p>
             <a:fld id="{C1FF6DA9-008F-8B48-92A6-B652298478BF}" type="slidenum">
               <a:rPr lang="en-US" smtClean="0"/>
-              <a:t>‹#›</a:t>
+              <a:t>‹N°›</a:t>
             </a:fld>
             <a:endParaRPr lang="en-US"/>
           </a:p>
@@ -576,10 +588,9 @@
           <a:lstStyle/>
           <a:p>
             <a:r>
-              <a:rPr lang="en-US" smtClean="0"/>
+              <a:rPr lang="en-US"/>
               <a:t>Click to edit Master title style</a:t>
             </a:r>
-            <a:endParaRPr lang="en-US"/>
           </a:p>
         </p:txBody>
       </p:sp>
@@ -605,38 +616,37 @@
           <a:p>
             <a:pPr lvl="0"/>
             <a:r>
-              <a:rPr lang="en-US" smtClean="0"/>
+              <a:rPr lang="en-US"/>
               <a:t>Click to edit Master text styles</a:t>
             </a:r>
           </a:p>
           <a:p>
             <a:pPr lvl="1"/>
             <a:r>
-              <a:rPr lang="en-US" smtClean="0"/>
+              <a:rPr lang="en-US"/>
               <a:t>Second level</a:t>
             </a:r>
           </a:p>
           <a:p>
             <a:pPr lvl="2"/>
             <a:r>
-              <a:rPr lang="en-US" smtClean="0"/>
+              <a:rPr lang="en-US"/>
               <a:t>Third level</a:t>
             </a:r>
           </a:p>
           <a:p>
             <a:pPr lvl="3"/>
             <a:r>
-              <a:rPr lang="en-US" smtClean="0"/>
+              <a:rPr lang="en-US"/>
               <a:t>Fourth level</a:t>
             </a:r>
           </a:p>
           <a:p>
             <a:pPr lvl="4"/>
             <a:r>
-              <a:rPr lang="en-US" smtClean="0"/>
+              <a:rPr lang="en-US"/>
               <a:t>Fifth level</a:t>
             </a:r>
-            <a:endParaRPr lang="en-US"/>
           </a:p>
         </p:txBody>
       </p:sp>
@@ -657,7 +667,7 @@
           <a:p>
             <a:fld id="{5BCAD085-E8A6-8845-BD4E-CB4CCA059FC4}" type="datetimeFigureOut">
               <a:rPr lang="en-US" smtClean="0"/>
-              <a:t>1/27/13</a:t>
+              <a:t>6/16/2026</a:t>
             </a:fld>
             <a:endParaRPr lang="en-US"/>
           </a:p>
@@ -699,7 +709,7 @@
           <a:p>
             <a:fld id="{C1FF6DA9-008F-8B48-92A6-B652298478BF}" type="slidenum">
               <a:rPr lang="en-US" smtClean="0"/>
-              <a:t>‹#›</a:t>
+              <a:t>‹N°›</a:t>
             </a:fld>
             <a:endParaRPr lang="en-US"/>
           </a:p>
@@ -751,10 +761,9 @@
           <a:lstStyle/>
           <a:p>
             <a:r>
-              <a:rPr lang="en-US" smtClean="0"/>
+              <a:rPr lang="en-US"/>
               <a:t>Click to edit Master title style</a:t>
             </a:r>
-            <a:endParaRPr lang="en-US"/>
           </a:p>
         </p:txBody>
       </p:sp>
@@ -775,38 +784,37 @@
           <a:p>
             <a:pPr lvl="0"/>
             <a:r>
-              <a:rPr lang="en-US" smtClean="0"/>
+              <a:rPr lang="en-US"/>
               <a:t>Click to edit Master text styles</a:t>
             </a:r>
           </a:p>
           <a:p>
             <a:pPr lvl="1"/>
             <a:r>
-              <a:rPr lang="en-US" smtClean="0"/>
+              <a:rPr lang="en-US"/>
               <a:t>Second level</a:t>
             </a:r>
           </a:p>
           <a:p>
             <a:pPr lvl="2"/>
             <a:r>
-              <a:rPr lang="en-US" smtClean="0"/>
+              <a:rPr lang="en-US"/>
               <a:t>Third level</a:t>
             </a:r>
           </a:p>
           <a:p>
             <a:pPr lvl="3"/>
             <a:r>
-              <a:rPr lang="en-US" smtClean="0"/>
+              <a:rPr lang="en-US"/>
               <a:t>Fourth level</a:t>
             </a:r>
           </a:p>
           <a:p>
             <a:pPr lvl="4"/>
             <a:r>
-              <a:rPr lang="en-US" smtClean="0"/>
+              <a:rPr lang="en-US"/>
               <a:t>Fifth level</a:t>
             </a:r>
-            <a:endParaRPr lang="en-US"/>
           </a:p>
         </p:txBody>
       </p:sp>
@@ -827,7 +835,7 @@
           <a:p>
             <a:fld id="{5BCAD085-E8A6-8845-BD4E-CB4CCA059FC4}" type="datetimeFigureOut">
               <a:rPr lang="en-US" smtClean="0"/>
-              <a:t>1/27/13</a:t>
+              <a:t>6/16/2026</a:t>
             </a:fld>
             <a:endParaRPr lang="en-US"/>
           </a:p>
@@ -869,7 +877,7 @@
           <a:p>
             <a:fld id="{C1FF6DA9-008F-8B48-92A6-B652298478BF}" type="slidenum">
               <a:rPr lang="en-US" smtClean="0"/>
-              <a:t>‹#›</a:t>
+              <a:t>‹N°›</a:t>
             </a:fld>
             <a:endParaRPr lang="en-US"/>
           </a:p>
@@ -930,10 +938,9 @@
           </a:lstStyle>
           <a:p>
             <a:r>
-              <a:rPr lang="en-US" smtClean="0"/>
+              <a:rPr lang="en-US"/>
               <a:t>Click to edit Master title style</a:t>
             </a:r>
-            <a:endParaRPr lang="en-US"/>
           </a:p>
         </p:txBody>
       </p:sp>
@@ -1050,7 +1057,7 @@
           <a:p>
             <a:pPr lvl="0"/>
             <a:r>
-              <a:rPr lang="en-US" smtClean="0"/>
+              <a:rPr lang="en-US"/>
               <a:t>Click to edit Master text styles</a:t>
             </a:r>
           </a:p>
@@ -1073,7 +1080,7 @@
           <a:p>
             <a:fld id="{5BCAD085-E8A6-8845-BD4E-CB4CCA059FC4}" type="datetimeFigureOut">
               <a:rPr lang="en-US" smtClean="0"/>
-              <a:t>1/27/13</a:t>
+              <a:t>6/16/2026</a:t>
             </a:fld>
             <a:endParaRPr lang="en-US"/>
           </a:p>
@@ -1115,7 +1122,7 @@
           <a:p>
             <a:fld id="{C1FF6DA9-008F-8B48-92A6-B652298478BF}" type="slidenum">
               <a:rPr lang="en-US" smtClean="0"/>
-              <a:t>‹#›</a:t>
+              <a:t>‹N°›</a:t>
             </a:fld>
             <a:endParaRPr lang="en-US"/>
           </a:p>
@@ -1167,10 +1174,9 @@
           <a:lstStyle/>
           <a:p>
             <a:r>
-              <a:rPr lang="en-US" smtClean="0"/>
+              <a:rPr lang="en-US"/>
               <a:t>Click to edit Master title style</a:t>
             </a:r>
-            <a:endParaRPr lang="en-US"/>
           </a:p>
         </p:txBody>
       </p:sp>
@@ -1224,38 +1230,37 @@
           <a:p>
             <a:pPr lvl="0"/>
             <a:r>
-              <a:rPr lang="en-US" smtClean="0"/>
+              <a:rPr lang="en-US"/>
               <a:t>Click to edit Master text styles</a:t>
             </a:r>
           </a:p>
           <a:p>
             <a:pPr lvl="1"/>
             <a:r>
-              <a:rPr lang="en-US" smtClean="0"/>
+              <a:rPr lang="en-US"/>
               <a:t>Second level</a:t>
             </a:r>
           </a:p>
           <a:p>
             <a:pPr lvl="2"/>
             <a:r>
-              <a:rPr lang="en-US" smtClean="0"/>
+              <a:rPr lang="en-US"/>
               <a:t>Third level</a:t>
             </a:r>
           </a:p>
           <a:p>
             <a:pPr lvl="3"/>
             <a:r>
-              <a:rPr lang="en-US" smtClean="0"/>
+              <a:rPr lang="en-US"/>
               <a:t>Fourth level</a:t>
             </a:r>
           </a:p>
           <a:p>
             <a:pPr lvl="4"/>
             <a:r>
-              <a:rPr lang="en-US" smtClean="0"/>
+              <a:rPr lang="en-US"/>
               <a:t>Fifth level</a:t>
             </a:r>
-            <a:endParaRPr lang="en-US"/>
           </a:p>
         </p:txBody>
       </p:sp>
@@ -1309,38 +1314,37 @@
           <a:p>
             <a:pPr lvl="0"/>
             <a:r>
-              <a:rPr lang="en-US" smtClean="0"/>
+              <a:rPr lang="en-US"/>
               <a:t>Click to edit Master text styles</a:t>
             </a:r>
           </a:p>
           <a:p>
             <a:pPr lvl="1"/>
             <a:r>
-              <a:rPr lang="en-US" smtClean="0"/>
+              <a:rPr lang="en-US"/>
               <a:t>Second level</a:t>
             </a:r>
           </a:p>
           <a:p>
             <a:pPr lvl="2"/>
             <a:r>
-              <a:rPr lang="en-US" smtClean="0"/>
+              <a:rPr lang="en-US"/>
               <a:t>Third level</a:t>
             </a:r>
           </a:p>
           <a:p>
             <a:pPr lvl="3"/>
             <a:r>
-              <a:rPr lang="en-US" smtClean="0"/>
+              <a:rPr lang="en-US"/>
               <a:t>Fourth level</a:t>
             </a:r>
           </a:p>
           <a:p>
             <a:pPr lvl="4"/>
             <a:r>
-              <a:rPr lang="en-US" smtClean="0"/>
+              <a:rPr lang="en-US"/>
               <a:t>Fifth level</a:t>
             </a:r>
-            <a:endParaRPr lang="en-US"/>
           </a:p>
         </p:txBody>
       </p:sp>
@@ -1361,7 +1365,7 @@
           <a:p>
             <a:fld id="{5BCAD085-E8A6-8845-BD4E-CB4CCA059FC4}" type="datetimeFigureOut">
               <a:rPr lang="en-US" smtClean="0"/>
-              <a:t>1/27/13</a:t>
+              <a:t>6/16/2026</a:t>
             </a:fld>
             <a:endParaRPr lang="en-US"/>
           </a:p>
@@ -1403,7 +1407,7 @@
           <a:p>
             <a:fld id="{C1FF6DA9-008F-8B48-92A6-B652298478BF}" type="slidenum">
               <a:rPr lang="en-US" smtClean="0"/>
-              <a:t>‹#›</a:t>
+              <a:t>‹N°›</a:t>
             </a:fld>
             <a:endParaRPr lang="en-US"/>
           </a:p>
@@ -1459,10 +1463,9 @@
           </a:lstStyle>
           <a:p>
             <a:r>
-              <a:rPr lang="en-US" smtClean="0"/>
+              <a:rPr lang="en-US"/>
               <a:t>Click to edit Master title style</a:t>
             </a:r>
-            <a:endParaRPr lang="en-US"/>
           </a:p>
         </p:txBody>
       </p:sp>
@@ -1525,7 +1528,7 @@
           <a:p>
             <a:pPr lvl="0"/>
             <a:r>
-              <a:rPr lang="en-US" smtClean="0"/>
+              <a:rPr lang="en-US"/>
               <a:t>Click to edit Master text styles</a:t>
             </a:r>
           </a:p>
@@ -1581,38 +1584,37 @@
           <a:p>
             <a:pPr lvl="0"/>
             <a:r>
-              <a:rPr lang="en-US" smtClean="0"/>
+              <a:rPr lang="en-US"/>
               <a:t>Click to edit Master text styles</a:t>
             </a:r>
           </a:p>
           <a:p>
             <a:pPr lvl="1"/>
             <a:r>
-              <a:rPr lang="en-US" smtClean="0"/>
+              <a:rPr lang="en-US"/>
               <a:t>Second level</a:t>
             </a:r>
           </a:p>
           <a:p>
             <a:pPr lvl="2"/>
             <a:r>
-              <a:rPr lang="en-US" smtClean="0"/>
+              <a:rPr lang="en-US"/>
               <a:t>Third level</a:t>
             </a:r>
           </a:p>
           <a:p>
             <a:pPr lvl="3"/>
             <a:r>
-              <a:rPr lang="en-US" smtClean="0"/>
+              <a:rPr lang="en-US"/>
               <a:t>Fourth level</a:t>
             </a:r>
           </a:p>
           <a:p>
             <a:pPr lvl="4"/>
             <a:r>
-              <a:rPr lang="en-US" smtClean="0"/>
+              <a:rPr lang="en-US"/>
               <a:t>Fifth level</a:t>
             </a:r>
-            <a:endParaRPr lang="en-US"/>
           </a:p>
         </p:txBody>
       </p:sp>
@@ -1675,7 +1677,7 @@
           <a:p>
             <a:pPr lvl="0"/>
             <a:r>
-              <a:rPr lang="en-US" smtClean="0"/>
+              <a:rPr lang="en-US"/>
               <a:t>Click to edit Master text styles</a:t>
             </a:r>
           </a:p>
@@ -1731,38 +1733,37 @@
           <a:p>
             <a:pPr lvl="0"/>
             <a:r>
-              <a:rPr lang="en-US" smtClean="0"/>
+              <a:rPr lang="en-US"/>
               <a:t>Click to edit Master text styles</a:t>
             </a:r>
           </a:p>
           <a:p>
             <a:pPr lvl="1"/>
             <a:r>
-              <a:rPr lang="en-US" smtClean="0"/>
+              <a:rPr lang="en-US"/>
               <a:t>Second level</a:t>
             </a:r>
           </a:p>
           <a:p>
             <a:pPr lvl="2"/>
             <a:r>
-              <a:rPr lang="en-US" smtClean="0"/>
+              <a:rPr lang="en-US"/>
               <a:t>Third level</a:t>
             </a:r>
           </a:p>
           <a:p>
             <a:pPr lvl="3"/>
             <a:r>
-              <a:rPr lang="en-US" smtClean="0"/>
+              <a:rPr lang="en-US"/>
               <a:t>Fourth level</a:t>
             </a:r>
           </a:p>
           <a:p>
             <a:pPr lvl="4"/>
             <a:r>
-              <a:rPr lang="en-US" smtClean="0"/>
+              <a:rPr lang="en-US"/>
               <a:t>Fifth level</a:t>
             </a:r>
-            <a:endParaRPr lang="en-US"/>
           </a:p>
         </p:txBody>
       </p:sp>
@@ -1783,7 +1784,7 @@
           <a:p>
             <a:fld id="{5BCAD085-E8A6-8845-BD4E-CB4CCA059FC4}" type="datetimeFigureOut">
               <a:rPr lang="en-US" smtClean="0"/>
-              <a:t>1/27/13</a:t>
+              <a:t>6/16/2026</a:t>
             </a:fld>
             <a:endParaRPr lang="en-US"/>
           </a:p>
@@ -1825,7 +1826,7 @@
           <a:p>
             <a:fld id="{C1FF6DA9-008F-8B48-92A6-B652298478BF}" type="slidenum">
               <a:rPr lang="en-US" smtClean="0"/>
-              <a:t>‹#›</a:t>
+              <a:t>‹N°›</a:t>
             </a:fld>
             <a:endParaRPr lang="en-US"/>
           </a:p>
@@ -1877,10 +1878,9 @@
           <a:lstStyle/>
           <a:p>
             <a:r>
-              <a:rPr lang="en-US" smtClean="0"/>
+              <a:rPr lang="en-US"/>
               <a:t>Click to edit Master title style</a:t>
             </a:r>
-            <a:endParaRPr lang="en-US"/>
           </a:p>
         </p:txBody>
       </p:sp>
@@ -1901,7 +1901,7 @@
           <a:p>
             <a:fld id="{5BCAD085-E8A6-8845-BD4E-CB4CCA059FC4}" type="datetimeFigureOut">
               <a:rPr lang="en-US" smtClean="0"/>
-              <a:t>1/27/13</a:t>
+              <a:t>6/16/2026</a:t>
             </a:fld>
             <a:endParaRPr lang="en-US"/>
           </a:p>
@@ -1943,7 +1943,7 @@
           <a:p>
             <a:fld id="{C1FF6DA9-008F-8B48-92A6-B652298478BF}" type="slidenum">
               <a:rPr lang="en-US" smtClean="0"/>
-              <a:t>‹#›</a:t>
+              <a:t>‹N°›</a:t>
             </a:fld>
             <a:endParaRPr lang="en-US"/>
           </a:p>
@@ -1996,7 +1996,7 @@
           <a:p>
             <a:fld id="{5BCAD085-E8A6-8845-BD4E-CB4CCA059FC4}" type="datetimeFigureOut">
               <a:rPr lang="en-US" smtClean="0"/>
-              <a:t>1/27/13</a:t>
+              <a:t>6/16/2026</a:t>
             </a:fld>
             <a:endParaRPr lang="en-US"/>
           </a:p>
@@ -2038,7 +2038,7 @@
           <a:p>
             <a:fld id="{C1FF6DA9-008F-8B48-92A6-B652298478BF}" type="slidenum">
               <a:rPr lang="en-US" smtClean="0"/>
-              <a:t>‹#›</a:t>
+              <a:t>‹N°›</a:t>
             </a:fld>
             <a:endParaRPr lang="en-US"/>
           </a:p>
@@ -2099,10 +2099,9 @@
           </a:lstStyle>
           <a:p>
             <a:r>
-              <a:rPr lang="en-US" smtClean="0"/>
+              <a:rPr lang="en-US"/>
               <a:t>Click to edit Master title style</a:t>
             </a:r>
-            <a:endParaRPr lang="en-US"/>
           </a:p>
         </p:txBody>
       </p:sp>
@@ -2156,38 +2155,37 @@
           <a:p>
             <a:pPr lvl="0"/>
             <a:r>
-              <a:rPr lang="en-US" smtClean="0"/>
+              <a:rPr lang="en-US"/>
               <a:t>Click to edit Master text styles</a:t>
             </a:r>
           </a:p>
           <a:p>
             <a:pPr lvl="1"/>
             <a:r>
-              <a:rPr lang="en-US" smtClean="0"/>
+              <a:rPr lang="en-US"/>
               <a:t>Second level</a:t>
             </a:r>
           </a:p>
           <a:p>
             <a:pPr lvl="2"/>
             <a:r>
-              <a:rPr lang="en-US" smtClean="0"/>
+              <a:rPr lang="en-US"/>
               <a:t>Third level</a:t>
             </a:r>
           </a:p>
           <a:p>
             <a:pPr lvl="3"/>
             <a:r>
-              <a:rPr lang="en-US" smtClean="0"/>
+              <a:rPr lang="en-US"/>
               <a:t>Fourth level</a:t>
             </a:r>
           </a:p>
           <a:p>
             <a:pPr lvl="4"/>
             <a:r>
-              <a:rPr lang="en-US" smtClean="0"/>
+              <a:rPr lang="en-US"/>
               <a:t>Fifth level</a:t>
             </a:r>
-            <a:endParaRPr lang="en-US"/>
           </a:p>
         </p:txBody>
       </p:sp>
@@ -2250,7 +2248,7 @@
           <a:p>
             <a:pPr lvl="0"/>
             <a:r>
-              <a:rPr lang="en-US" smtClean="0"/>
+              <a:rPr lang="en-US"/>
               <a:t>Click to edit Master text styles</a:t>
             </a:r>
           </a:p>
@@ -2273,7 +2271,7 @@
           <a:p>
             <a:fld id="{5BCAD085-E8A6-8845-BD4E-CB4CCA059FC4}" type="datetimeFigureOut">
               <a:rPr lang="en-US" smtClean="0"/>
-              <a:t>1/27/13</a:t>
+              <a:t>6/16/2026</a:t>
             </a:fld>
             <a:endParaRPr lang="en-US"/>
           </a:p>
@@ -2315,7 +2313,7 @@
           <a:p>
             <a:fld id="{C1FF6DA9-008F-8B48-92A6-B652298478BF}" type="slidenum">
               <a:rPr lang="en-US" smtClean="0"/>
-              <a:t>‹#›</a:t>
+              <a:t>‹N°›</a:t>
             </a:fld>
             <a:endParaRPr lang="en-US"/>
           </a:p>
@@ -2376,10 +2374,9 @@
           </a:lstStyle>
           <a:p>
             <a:r>
-              <a:rPr lang="en-US" smtClean="0"/>
+              <a:rPr lang="en-US"/>
               <a:t>Click to edit Master title style</a:t>
             </a:r>
-            <a:endParaRPr lang="en-US"/>
           </a:p>
         </p:txBody>
       </p:sp>
@@ -2503,7 +2500,7 @@
           <a:p>
             <a:pPr lvl="0"/>
             <a:r>
-              <a:rPr lang="en-US" smtClean="0"/>
+              <a:rPr lang="en-US"/>
               <a:t>Click to edit Master text styles</a:t>
             </a:r>
           </a:p>
@@ -2526,7 +2523,7 @@
           <a:p>
             <a:fld id="{5BCAD085-E8A6-8845-BD4E-CB4CCA059FC4}" type="datetimeFigureOut">
               <a:rPr lang="en-US" smtClean="0"/>
-              <a:t>1/27/13</a:t>
+              <a:t>6/16/2026</a:t>
             </a:fld>
             <a:endParaRPr lang="en-US"/>
           </a:p>
@@ -2568,7 +2565,7 @@
           <a:p>
             <a:fld id="{C1FF6DA9-008F-8B48-92A6-B652298478BF}" type="slidenum">
               <a:rPr lang="en-US" smtClean="0"/>
-              <a:t>‹#›</a:t>
+              <a:t>‹N°›</a:t>
             </a:fld>
             <a:endParaRPr lang="en-US"/>
           </a:p>
@@ -2635,10 +2632,9 @@
           <a:lstStyle/>
           <a:p>
             <a:r>
-              <a:rPr lang="en-US" smtClean="0"/>
+              <a:rPr lang="en-US"/>
               <a:t>Click to edit Master title style</a:t>
             </a:r>
-            <a:endParaRPr lang="en-US"/>
           </a:p>
         </p:txBody>
       </p:sp>
@@ -2669,38 +2665,37 @@
           <a:p>
             <a:pPr lvl="0"/>
             <a:r>
-              <a:rPr lang="en-US" smtClean="0"/>
+              <a:rPr lang="en-US"/>
               <a:t>Click to edit Master text styles</a:t>
             </a:r>
           </a:p>
           <a:p>
             <a:pPr lvl="1"/>
             <a:r>
-              <a:rPr lang="en-US" smtClean="0"/>
+              <a:rPr lang="en-US"/>
               <a:t>Second level</a:t>
             </a:r>
           </a:p>
           <a:p>
             <a:pPr lvl="2"/>
             <a:r>
-              <a:rPr lang="en-US" smtClean="0"/>
+              <a:rPr lang="en-US"/>
               <a:t>Third level</a:t>
             </a:r>
           </a:p>
           <a:p>
             <a:pPr lvl="3"/>
             <a:r>
-              <a:rPr lang="en-US" smtClean="0"/>
+              <a:rPr lang="en-US"/>
               <a:t>Fourth level</a:t>
             </a:r>
           </a:p>
           <a:p>
             <a:pPr lvl="4"/>
             <a:r>
-              <a:rPr lang="en-US" smtClean="0"/>
+              <a:rPr lang="en-US"/>
               <a:t>Fifth level</a:t>
             </a:r>
-            <a:endParaRPr lang="en-US"/>
           </a:p>
         </p:txBody>
       </p:sp>
@@ -2739,7 +2734,7 @@
           <a:p>
             <a:fld id="{5BCAD085-E8A6-8845-BD4E-CB4CCA059FC4}" type="datetimeFigureOut">
               <a:rPr lang="en-US" smtClean="0"/>
-              <a:t>1/27/13</a:t>
+              <a:t>6/16/2026</a:t>
             </a:fld>
             <a:endParaRPr lang="en-US"/>
           </a:p>
@@ -2817,7 +2812,7 @@
           <a:p>
             <a:fld id="{C1FF6DA9-008F-8B48-92A6-B652298478BF}" type="slidenum">
               <a:rPr lang="en-US" smtClean="0"/>
-              <a:t>‹#›</a:t>
+              <a:t>‹N°›</a:t>
             </a:fld>
             <a:endParaRPr lang="en-US"/>
           </a:p>
@@ -3098,7 +3093,7 @@
 </file>
 
 <file path=ppt/slides/slide1.xml><?xml version="1.0" encoding="utf-8"?>
-<p:sld xmlns:a="http://schemas.openxmlformats.org/drawingml/2006/main" xmlns:p="http://schemas.openxmlformats.org/presentationml/2006/main" xmlns:r="http://schemas.openxmlformats.org/officeDocument/2006/relationships">
+<p:sld xmlns:a="http://schemas.openxmlformats.org/drawingml/2006/main" xmlns:r="http://schemas.openxmlformats.org/officeDocument/2006/relationships" xmlns:p="http://schemas.openxmlformats.org/presentationml/2006/main">
   <p:cSld>
     <p:spTree>
       <p:nvGrpSpPr>
@@ -3106,7 +3101,14 @@
         <p:cNvGrpSpPr/>
         <p:nvPr/>
       </p:nvGrpSpPr>
-      <p:grpSpPr/>
+      <p:grpSpPr>
+        <a:xfrm>
+          <a:off x="0" y="0"/>
+          <a:ext cx="0" cy="0"/>
+          <a:chOff x="0" y="0"/>
+          <a:chExt cx="0" cy="0"/>
+        </a:xfrm>
+      </p:grpSpPr>
       <p:sp>
         <p:nvSpPr>
           <p:cNvPr id="2" name="Rectangle 1"/>
@@ -3148,6 +3150,7 @@
           <a:lstStyle/>
           <a:p>
             <a:pPr algn="ctr"/>
+            <a:endParaRPr/>
           </a:p>
         </p:txBody>
       </p:sp>
@@ -3192,6 +3195,7 @@
           <a:lstStyle/>
           <a:p>
             <a:pPr algn="ctr"/>
+            <a:endParaRPr/>
           </a:p>
         </p:txBody>
       </p:sp>
@@ -3236,6 +3240,7 @@
           <a:lstStyle/>
           <a:p>
             <a:pPr algn="ctr"/>
+            <a:endParaRPr/>
           </a:p>
         </p:txBody>
       </p:sp>
@@ -3256,7 +3261,7 @@
           <a:noFill/>
         </p:spPr>
         <p:txBody>
-          <a:bodyPr wrap="square" anchor="t" lIns="0" rIns="0" tIns="0" bIns="0">
+          <a:bodyPr wrap="square" lIns="0" tIns="0" rIns="0" bIns="0" anchor="t">
             <a:spAutoFit/>
           </a:bodyPr>
           <a:lstStyle/>
@@ -3295,7 +3300,7 @@
           <a:noFill/>
         </p:spPr>
         <p:txBody>
-          <a:bodyPr wrap="square" anchor="t" lIns="0" rIns="0" tIns="0" bIns="0">
+          <a:bodyPr wrap="square" lIns="0" tIns="0" rIns="0" bIns="0" anchor="t">
             <a:spAutoFit/>
           </a:bodyPr>
           <a:lstStyle/>
@@ -3358,6 +3363,7 @@
           <a:lstStyle/>
           <a:p>
             <a:pPr algn="ctr"/>
+            <a:endParaRPr/>
           </a:p>
         </p:txBody>
       </p:sp>
@@ -3378,7 +3384,7 @@
           <a:noFill/>
         </p:spPr>
         <p:txBody>
-          <a:bodyPr wrap="square" anchor="t" lIns="0" rIns="0" tIns="0" bIns="0">
+          <a:bodyPr wrap="square" lIns="0" tIns="0" rIns="0" bIns="0" anchor="t">
             <a:spAutoFit/>
           </a:bodyPr>
           <a:lstStyle/>
@@ -3417,7 +3423,7 @@
           <a:noFill/>
         </p:spPr>
         <p:txBody>
-          <a:bodyPr wrap="square" anchor="t" lIns="0" rIns="0" tIns="0" bIns="0">
+          <a:bodyPr wrap="square" lIns="0" tIns="0" rIns="0" bIns="0" anchor="t">
             <a:spAutoFit/>
           </a:bodyPr>
           <a:lstStyle/>
@@ -3456,7 +3462,7 @@
           <a:noFill/>
         </p:spPr>
         <p:txBody>
-          <a:bodyPr wrap="square" anchor="t" lIns="0" rIns="0" tIns="0" bIns="0">
+          <a:bodyPr wrap="square" lIns="0" tIns="0" rIns="0" bIns="0" anchor="t">
             <a:spAutoFit/>
           </a:bodyPr>
           <a:lstStyle/>
@@ -3487,7 +3493,7 @@
 </file>
 
 <file path=ppt/slides/slide10.xml><?xml version="1.0" encoding="utf-8"?>
-<p:sld xmlns:a="http://schemas.openxmlformats.org/drawingml/2006/main" xmlns:p="http://schemas.openxmlformats.org/presentationml/2006/main" xmlns:r="http://schemas.openxmlformats.org/officeDocument/2006/relationships">
+<p:sld xmlns:a="http://schemas.openxmlformats.org/drawingml/2006/main" xmlns:r="http://schemas.openxmlformats.org/officeDocument/2006/relationships" xmlns:p="http://schemas.openxmlformats.org/presentationml/2006/main">
   <p:cSld>
     <p:spTree>
       <p:nvGrpSpPr>
@@ -3495,7 +3501,14 @@
         <p:cNvGrpSpPr/>
         <p:nvPr/>
       </p:nvGrpSpPr>
-      <p:grpSpPr/>
+      <p:grpSpPr>
+        <a:xfrm>
+          <a:off x="0" y="0"/>
+          <a:ext cx="0" cy="0"/>
+          <a:chOff x="0" y="0"/>
+          <a:chExt cx="0" cy="0"/>
+        </a:xfrm>
+      </p:grpSpPr>
       <p:sp>
         <p:nvSpPr>
           <p:cNvPr id="2" name="TextBox 1"/>
@@ -3513,7 +3526,7 @@
           <a:noFill/>
         </p:spPr>
         <p:txBody>
-          <a:bodyPr wrap="square" anchor="t" lIns="0" rIns="0" tIns="0" bIns="0">
+          <a:bodyPr wrap="square" lIns="0" tIns="0" rIns="0" bIns="0" anchor="t">
             <a:spAutoFit/>
           </a:bodyPr>
           <a:lstStyle/>
@@ -3552,7 +3565,7 @@
           <a:noFill/>
         </p:spPr>
         <p:txBody>
-          <a:bodyPr wrap="square" anchor="t" lIns="0" rIns="0" tIns="0" bIns="0">
+          <a:bodyPr wrap="square" lIns="0" tIns="0" rIns="0" bIns="0" anchor="t">
             <a:spAutoFit/>
           </a:bodyPr>
           <a:lstStyle/>
@@ -3615,6 +3628,7 @@
           <a:lstStyle/>
           <a:p>
             <a:pPr algn="ctr"/>
+            <a:endParaRPr/>
           </a:p>
         </p:txBody>
       </p:sp>
@@ -3659,6 +3673,7 @@
           <a:lstStyle/>
           <a:p>
             <a:pPr algn="ctr"/>
+            <a:endParaRPr/>
           </a:p>
         </p:txBody>
       </p:sp>
@@ -3679,7 +3694,7 @@
           <a:noFill/>
         </p:spPr>
         <p:txBody>
-          <a:bodyPr wrap="square" anchor="t" lIns="0" rIns="0" tIns="0" bIns="0">
+          <a:bodyPr wrap="square" lIns="0" tIns="0" rIns="0" bIns="0" anchor="t">
             <a:spAutoFit/>
           </a:bodyPr>
           <a:lstStyle/>
@@ -3718,7 +3733,7 @@
           <a:noFill/>
         </p:spPr>
         <p:txBody>
-          <a:bodyPr wrap="square" anchor="t" lIns="0" rIns="0" tIns="0" bIns="0">
+          <a:bodyPr wrap="square" lIns="0" tIns="0" rIns="0" bIns="0" anchor="t">
             <a:spAutoFit/>
           </a:bodyPr>
           <a:lstStyle/>
@@ -3781,6 +3796,7 @@
           <a:lstStyle/>
           <a:p>
             <a:pPr algn="ctr"/>
+            <a:endParaRPr/>
           </a:p>
         </p:txBody>
       </p:sp>
@@ -3829,6 +3845,7 @@
           <a:lstStyle/>
           <a:p>
             <a:pPr algn="ctr"/>
+            <a:endParaRPr/>
           </a:p>
         </p:txBody>
       </p:sp>
@@ -3849,7 +3866,7 @@
           <a:noFill/>
         </p:spPr>
         <p:txBody>
-          <a:bodyPr wrap="square" anchor="t" lIns="0" rIns="0" tIns="0" bIns="0">
+          <a:bodyPr wrap="square" lIns="0" tIns="0" rIns="0" bIns="0" anchor="t">
             <a:spAutoFit/>
           </a:bodyPr>
           <a:lstStyle/>
@@ -3888,7 +3905,7 @@
           <a:noFill/>
         </p:spPr>
         <p:txBody>
-          <a:bodyPr wrap="square" anchor="t" lIns="0" rIns="0" tIns="0" bIns="0">
+          <a:bodyPr wrap="square" lIns="0" tIns="0" rIns="0" bIns="0" anchor="t">
             <a:spAutoFit/>
           </a:bodyPr>
           <a:lstStyle/>
@@ -3927,7 +3944,7 @@
           <a:noFill/>
         </p:spPr>
         <p:txBody>
-          <a:bodyPr wrap="square" anchor="t" lIns="0" rIns="0" tIns="0" bIns="0">
+          <a:bodyPr wrap="square" lIns="0" tIns="0" rIns="0" bIns="0" anchor="t">
             <a:spAutoFit/>
           </a:bodyPr>
           <a:lstStyle/>
@@ -4022,6 +4039,7 @@
           <a:lstStyle/>
           <a:p>
             <a:pPr algn="ctr"/>
+            <a:endParaRPr/>
           </a:p>
         </p:txBody>
       </p:sp>
@@ -4070,6 +4088,7 @@
           <a:lstStyle/>
           <a:p>
             <a:pPr algn="ctr"/>
+            <a:endParaRPr/>
           </a:p>
         </p:txBody>
       </p:sp>
@@ -4090,7 +4109,7 @@
           <a:noFill/>
         </p:spPr>
         <p:txBody>
-          <a:bodyPr wrap="square" anchor="t" lIns="0" rIns="0" tIns="0" bIns="0">
+          <a:bodyPr wrap="square" lIns="0" tIns="0" rIns="0" bIns="0" anchor="t">
             <a:spAutoFit/>
           </a:bodyPr>
           <a:lstStyle/>
@@ -4129,7 +4148,7 @@
           <a:noFill/>
         </p:spPr>
         <p:txBody>
-          <a:bodyPr wrap="square" anchor="t" lIns="0" rIns="0" tIns="0" bIns="0">
+          <a:bodyPr wrap="square" lIns="0" tIns="0" rIns="0" bIns="0" anchor="t">
             <a:spAutoFit/>
           </a:bodyPr>
           <a:lstStyle/>
@@ -4168,7 +4187,7 @@
           <a:noFill/>
         </p:spPr>
         <p:txBody>
-          <a:bodyPr wrap="square" anchor="t" lIns="0" rIns="0" tIns="0" bIns="0">
+          <a:bodyPr wrap="square" lIns="0" tIns="0" rIns="0" bIns="0" anchor="t">
             <a:spAutoFit/>
           </a:bodyPr>
           <a:lstStyle/>
@@ -4263,6 +4282,7 @@
           <a:lstStyle/>
           <a:p>
             <a:pPr algn="ctr"/>
+            <a:endParaRPr/>
           </a:p>
         </p:txBody>
       </p:sp>
@@ -4311,6 +4331,7 @@
           <a:lstStyle/>
           <a:p>
             <a:pPr algn="ctr"/>
+            <a:endParaRPr/>
           </a:p>
         </p:txBody>
       </p:sp>
@@ -4331,7 +4352,7 @@
           <a:noFill/>
         </p:spPr>
         <p:txBody>
-          <a:bodyPr wrap="square" anchor="t" lIns="0" rIns="0" tIns="0" bIns="0">
+          <a:bodyPr wrap="square" lIns="0" tIns="0" rIns="0" bIns="0" anchor="t">
             <a:spAutoFit/>
           </a:bodyPr>
           <a:lstStyle/>
@@ -4370,7 +4391,7 @@
           <a:noFill/>
         </p:spPr>
         <p:txBody>
-          <a:bodyPr wrap="square" anchor="t" lIns="0" rIns="0" tIns="0" bIns="0">
+          <a:bodyPr wrap="square" lIns="0" tIns="0" rIns="0" bIns="0" anchor="t">
             <a:spAutoFit/>
           </a:bodyPr>
           <a:lstStyle/>
@@ -4409,7 +4430,7 @@
           <a:noFill/>
         </p:spPr>
         <p:txBody>
-          <a:bodyPr wrap="square" anchor="t" lIns="0" rIns="0" tIns="0" bIns="0">
+          <a:bodyPr wrap="square" lIns="0" tIns="0" rIns="0" bIns="0" anchor="t">
             <a:spAutoFit/>
           </a:bodyPr>
           <a:lstStyle/>
@@ -4504,6 +4525,7 @@
           <a:lstStyle/>
           <a:p>
             <a:pPr algn="ctr"/>
+            <a:endParaRPr/>
           </a:p>
         </p:txBody>
       </p:sp>
@@ -4552,6 +4574,7 @@
           <a:lstStyle/>
           <a:p>
             <a:pPr algn="ctr"/>
+            <a:endParaRPr/>
           </a:p>
         </p:txBody>
       </p:sp>
@@ -4572,7 +4595,7 @@
           <a:noFill/>
         </p:spPr>
         <p:txBody>
-          <a:bodyPr wrap="square" anchor="t" lIns="0" rIns="0" tIns="0" bIns="0">
+          <a:bodyPr wrap="square" lIns="0" tIns="0" rIns="0" bIns="0" anchor="t">
             <a:spAutoFit/>
           </a:bodyPr>
           <a:lstStyle/>
@@ -4611,7 +4634,7 @@
           <a:noFill/>
         </p:spPr>
         <p:txBody>
-          <a:bodyPr wrap="square" anchor="t" lIns="0" rIns="0" tIns="0" bIns="0">
+          <a:bodyPr wrap="square" lIns="0" tIns="0" rIns="0" bIns="0" anchor="t">
             <a:spAutoFit/>
           </a:bodyPr>
           <a:lstStyle/>
@@ -4650,7 +4673,7 @@
           <a:noFill/>
         </p:spPr>
         <p:txBody>
-          <a:bodyPr wrap="square" anchor="t" lIns="0" rIns="0" tIns="0" bIns="0">
+          <a:bodyPr wrap="square" lIns="0" tIns="0" rIns="0" bIns="0" anchor="t">
             <a:spAutoFit/>
           </a:bodyPr>
           <a:lstStyle/>
@@ -4747,6 +4770,7 @@
           <a:lstStyle/>
           <a:p>
             <a:pPr algn="ctr"/>
+            <a:endParaRPr/>
           </a:p>
         </p:txBody>
       </p:sp>
@@ -4767,7 +4791,7 @@
           <a:noFill/>
         </p:spPr>
         <p:txBody>
-          <a:bodyPr wrap="square" anchor="t" lIns="0" rIns="0" tIns="0" bIns="0">
+          <a:bodyPr wrap="square" lIns="0" tIns="0" rIns="0" bIns="0" anchor="t">
             <a:spAutoFit/>
           </a:bodyPr>
           <a:lstStyle/>
@@ -4806,7 +4830,7 @@
           <a:noFill/>
         </p:spPr>
         <p:txBody>
-          <a:bodyPr wrap="square" anchor="t" lIns="0" rIns="0" tIns="0" bIns="0">
+          <a:bodyPr wrap="square" lIns="0" tIns="0" rIns="0" bIns="0" anchor="t">
             <a:spAutoFit/>
           </a:bodyPr>
           <a:lstStyle/>
@@ -4871,6 +4895,7 @@
           <a:lstStyle/>
           <a:p>
             <a:pPr algn="ctr"/>
+            <a:endParaRPr/>
           </a:p>
         </p:txBody>
       </p:sp>
@@ -4891,7 +4916,7 @@
           <a:noFill/>
         </p:spPr>
         <p:txBody>
-          <a:bodyPr wrap="square" anchor="t" lIns="0" rIns="0" tIns="0" bIns="0">
+          <a:bodyPr wrap="square" lIns="0" tIns="0" rIns="0" bIns="0" anchor="t">
             <a:spAutoFit/>
           </a:bodyPr>
           <a:lstStyle/>
@@ -4930,7 +4955,7 @@
           <a:noFill/>
         </p:spPr>
         <p:txBody>
-          <a:bodyPr wrap="square" anchor="t" lIns="0" rIns="0" tIns="0" bIns="0">
+          <a:bodyPr wrap="square" lIns="0" tIns="0" rIns="0" bIns="0" anchor="t">
             <a:spAutoFit/>
           </a:bodyPr>
           <a:lstStyle/>
@@ -4995,6 +5020,7 @@
           <a:lstStyle/>
           <a:p>
             <a:pPr algn="ctr"/>
+            <a:endParaRPr/>
           </a:p>
         </p:txBody>
       </p:sp>
@@ -5015,7 +5041,7 @@
           <a:noFill/>
         </p:spPr>
         <p:txBody>
-          <a:bodyPr wrap="square" anchor="t" lIns="0" rIns="0" tIns="0" bIns="0">
+          <a:bodyPr wrap="square" lIns="0" tIns="0" rIns="0" bIns="0" anchor="t">
             <a:spAutoFit/>
           </a:bodyPr>
           <a:lstStyle/>
@@ -5054,7 +5080,7 @@
           <a:noFill/>
         </p:spPr>
         <p:txBody>
-          <a:bodyPr wrap="square" anchor="t" lIns="0" rIns="0" tIns="0" bIns="0">
+          <a:bodyPr wrap="square" lIns="0" tIns="0" rIns="0" bIns="0" anchor="t">
             <a:spAutoFit/>
           </a:bodyPr>
           <a:lstStyle/>
@@ -5085,7 +5111,7 @@
 </file>
 
 <file path=ppt/slides/slide11.xml><?xml version="1.0" encoding="utf-8"?>
-<p:sld xmlns:a="http://schemas.openxmlformats.org/drawingml/2006/main" xmlns:p="http://schemas.openxmlformats.org/presentationml/2006/main" xmlns:r="http://schemas.openxmlformats.org/officeDocument/2006/relationships">
+<p:sld xmlns:a="http://schemas.openxmlformats.org/drawingml/2006/main" xmlns:r="http://schemas.openxmlformats.org/officeDocument/2006/relationships" xmlns:p="http://schemas.openxmlformats.org/presentationml/2006/main">
   <p:cSld>
     <p:spTree>
       <p:nvGrpSpPr>
@@ -5093,7 +5119,14 @@
         <p:cNvGrpSpPr/>
         <p:nvPr/>
       </p:nvGrpSpPr>
-      <p:grpSpPr/>
+      <p:grpSpPr>
+        <a:xfrm>
+          <a:off x="0" y="0"/>
+          <a:ext cx="0" cy="0"/>
+          <a:chOff x="0" y="0"/>
+          <a:chExt cx="0" cy="0"/>
+        </a:xfrm>
+      </p:grpSpPr>
       <p:sp>
         <p:nvSpPr>
           <p:cNvPr id="2" name="TextBox 1"/>
@@ -5111,7 +5144,7 @@
           <a:noFill/>
         </p:spPr>
         <p:txBody>
-          <a:bodyPr wrap="square" anchor="t" lIns="0" rIns="0" tIns="0" bIns="0">
+          <a:bodyPr wrap="square" lIns="0" tIns="0" rIns="0" bIns="0" anchor="t">
             <a:spAutoFit/>
           </a:bodyPr>
           <a:lstStyle/>
@@ -5150,7 +5183,7 @@
           <a:noFill/>
         </p:spPr>
         <p:txBody>
-          <a:bodyPr wrap="square" anchor="t" lIns="0" rIns="0" tIns="0" bIns="0">
+          <a:bodyPr wrap="square" lIns="0" tIns="0" rIns="0" bIns="0" anchor="t">
             <a:spAutoFit/>
           </a:bodyPr>
           <a:lstStyle/>
@@ -5213,6 +5246,7 @@
           <a:lstStyle/>
           <a:p>
             <a:pPr algn="ctr"/>
+            <a:endParaRPr/>
           </a:p>
         </p:txBody>
       </p:sp>
@@ -5257,6 +5291,7 @@
           <a:lstStyle/>
           <a:p>
             <a:pPr algn="ctr"/>
+            <a:endParaRPr/>
           </a:p>
         </p:txBody>
       </p:sp>
@@ -5277,7 +5312,7 @@
           <a:noFill/>
         </p:spPr>
         <p:txBody>
-          <a:bodyPr wrap="square" anchor="t" lIns="0" rIns="0" tIns="0" bIns="0">
+          <a:bodyPr wrap="square" lIns="0" tIns="0" rIns="0" bIns="0" anchor="t">
             <a:spAutoFit/>
           </a:bodyPr>
           <a:lstStyle/>
@@ -5316,7 +5351,7 @@
           <a:noFill/>
         </p:spPr>
         <p:txBody>
-          <a:bodyPr wrap="square" anchor="t" lIns="0" rIns="0" tIns="0" bIns="0">
+          <a:bodyPr wrap="square" lIns="0" tIns="0" rIns="0" bIns="0" anchor="t">
             <a:spAutoFit/>
           </a:bodyPr>
           <a:lstStyle/>
@@ -5381,6 +5416,7 @@
           <a:lstStyle/>
           <a:p>
             <a:pPr algn="ctr"/>
+            <a:endParaRPr/>
           </a:p>
         </p:txBody>
       </p:sp>
@@ -5401,7 +5437,7 @@
           <a:noFill/>
         </p:spPr>
         <p:txBody>
-          <a:bodyPr wrap="square" anchor="t" lIns="0" rIns="0" tIns="0" bIns="0">
+          <a:bodyPr wrap="square" lIns="0" tIns="0" rIns="0" bIns="0" anchor="t">
             <a:spAutoFit/>
           </a:bodyPr>
           <a:lstStyle/>
@@ -5440,7 +5476,7 @@
           <a:noFill/>
         </p:spPr>
         <p:txBody>
-          <a:bodyPr wrap="square" anchor="t" lIns="0" rIns="0" tIns="0" bIns="0">
+          <a:bodyPr wrap="square" lIns="0" tIns="0" rIns="0" bIns="0" anchor="t">
             <a:spAutoFit/>
           </a:bodyPr>
           <a:lstStyle/>
@@ -5553,6 +5589,7 @@
           <a:lstStyle/>
           <a:p>
             <a:pPr algn="ctr"/>
+            <a:endParaRPr/>
           </a:p>
         </p:txBody>
       </p:sp>
@@ -5573,7 +5610,7 @@
           <a:noFill/>
         </p:spPr>
         <p:txBody>
-          <a:bodyPr wrap="square" anchor="t" lIns="0" rIns="0" tIns="0" bIns="0">
+          <a:bodyPr wrap="square" lIns="0" tIns="0" rIns="0" bIns="0" anchor="t">
             <a:spAutoFit/>
           </a:bodyPr>
           <a:lstStyle/>
@@ -5612,7 +5649,7 @@
           <a:noFill/>
         </p:spPr>
         <p:txBody>
-          <a:bodyPr wrap="square" anchor="t" lIns="0" rIns="0" tIns="0" bIns="0">
+          <a:bodyPr wrap="square" lIns="0" tIns="0" rIns="0" bIns="0" anchor="t">
             <a:spAutoFit/>
           </a:bodyPr>
           <a:lstStyle/>
@@ -5725,6 +5762,7 @@
           <a:lstStyle/>
           <a:p>
             <a:pPr algn="ctr"/>
+            <a:endParaRPr/>
           </a:p>
         </p:txBody>
       </p:sp>
@@ -5745,7 +5783,7 @@
           <a:noFill/>
         </p:spPr>
         <p:txBody>
-          <a:bodyPr wrap="square" anchor="t" lIns="0" rIns="0" tIns="0" bIns="0">
+          <a:bodyPr wrap="square" lIns="0" tIns="0" rIns="0" bIns="0" anchor="t">
             <a:spAutoFit/>
           </a:bodyPr>
           <a:lstStyle/>
@@ -5784,7 +5822,7 @@
           <a:noFill/>
         </p:spPr>
         <p:txBody>
-          <a:bodyPr wrap="square" anchor="t" lIns="0" rIns="0" tIns="0" bIns="0">
+          <a:bodyPr wrap="square" lIns="0" tIns="0" rIns="0" bIns="0" anchor="t">
             <a:spAutoFit/>
           </a:bodyPr>
           <a:lstStyle/>
@@ -5897,6 +5935,7 @@
           <a:lstStyle/>
           <a:p>
             <a:pPr algn="ctr"/>
+            <a:endParaRPr/>
           </a:p>
         </p:txBody>
       </p:sp>
@@ -5917,7 +5956,7 @@
           <a:noFill/>
         </p:spPr>
         <p:txBody>
-          <a:bodyPr wrap="square" anchor="t" lIns="0" rIns="0" tIns="0" bIns="0">
+          <a:bodyPr wrap="square" lIns="0" tIns="0" rIns="0" bIns="0" anchor="t">
             <a:spAutoFit/>
           </a:bodyPr>
           <a:lstStyle/>
@@ -5956,7 +5995,7 @@
           <a:noFill/>
         </p:spPr>
         <p:txBody>
-          <a:bodyPr wrap="square" anchor="t" lIns="0" rIns="0" tIns="0" bIns="0">
+          <a:bodyPr wrap="square" lIns="0" tIns="0" rIns="0" bIns="0" anchor="t">
             <a:spAutoFit/>
           </a:bodyPr>
           <a:lstStyle/>
@@ -6035,7 +6074,7 @@
 </file>
 
 <file path=ppt/slides/slide12.xml><?xml version="1.0" encoding="utf-8"?>
-<p:sld xmlns:a="http://schemas.openxmlformats.org/drawingml/2006/main" xmlns:p="http://schemas.openxmlformats.org/presentationml/2006/main" xmlns:r="http://schemas.openxmlformats.org/officeDocument/2006/relationships">
+<p:sld xmlns:a="http://schemas.openxmlformats.org/drawingml/2006/main" xmlns:r="http://schemas.openxmlformats.org/officeDocument/2006/relationships" xmlns:p="http://schemas.openxmlformats.org/presentationml/2006/main">
   <p:cSld>
     <p:spTree>
       <p:nvGrpSpPr>
@@ -6043,7 +6082,14 @@
         <p:cNvGrpSpPr/>
         <p:nvPr/>
       </p:nvGrpSpPr>
-      <p:grpSpPr/>
+      <p:grpSpPr>
+        <a:xfrm>
+          <a:off x="0" y="0"/>
+          <a:ext cx="0" cy="0"/>
+          <a:chOff x="0" y="0"/>
+          <a:chExt cx="0" cy="0"/>
+        </a:xfrm>
+      </p:grpSpPr>
       <p:sp>
         <p:nvSpPr>
           <p:cNvPr id="2" name="TextBox 1"/>
@@ -6061,7 +6107,7 @@
           <a:noFill/>
         </p:spPr>
         <p:txBody>
-          <a:bodyPr wrap="square" anchor="t" lIns="0" rIns="0" tIns="0" bIns="0">
+          <a:bodyPr wrap="square" lIns="0" tIns="0" rIns="0" bIns="0" anchor="t">
             <a:spAutoFit/>
           </a:bodyPr>
           <a:lstStyle/>
@@ -6100,7 +6146,7 @@
           <a:noFill/>
         </p:spPr>
         <p:txBody>
-          <a:bodyPr wrap="square" anchor="t" lIns="0" rIns="0" tIns="0" bIns="0">
+          <a:bodyPr wrap="square" lIns="0" tIns="0" rIns="0" bIns="0" anchor="t">
             <a:spAutoFit/>
           </a:bodyPr>
           <a:lstStyle/>
@@ -6163,6 +6209,7 @@
           <a:lstStyle/>
           <a:p>
             <a:pPr algn="ctr"/>
+            <a:endParaRPr/>
           </a:p>
         </p:txBody>
       </p:sp>
@@ -6207,6 +6254,7 @@
           <a:lstStyle/>
           <a:p>
             <a:pPr algn="ctr"/>
+            <a:endParaRPr/>
           </a:p>
         </p:txBody>
       </p:sp>
@@ -6227,7 +6275,7 @@
           <a:noFill/>
         </p:spPr>
         <p:txBody>
-          <a:bodyPr wrap="square" anchor="t" lIns="0" rIns="0" tIns="0" bIns="0">
+          <a:bodyPr wrap="square" lIns="0" tIns="0" rIns="0" bIns="0" anchor="t">
             <a:spAutoFit/>
           </a:bodyPr>
           <a:lstStyle/>
@@ -6266,7 +6314,7 @@
           <a:noFill/>
         </p:spPr>
         <p:txBody>
-          <a:bodyPr wrap="square" anchor="t" lIns="0" rIns="0" tIns="0" bIns="0">
+          <a:bodyPr wrap="square" lIns="0" tIns="0" rIns="0" bIns="0" anchor="t">
             <a:spAutoFit/>
           </a:bodyPr>
           <a:lstStyle/>
@@ -6329,6 +6377,7 @@
           <a:lstStyle/>
           <a:p>
             <a:pPr algn="ctr"/>
+            <a:endParaRPr/>
           </a:p>
         </p:txBody>
       </p:sp>
@@ -6377,6 +6426,7 @@
           <a:lstStyle/>
           <a:p>
             <a:pPr algn="ctr"/>
+            <a:endParaRPr/>
           </a:p>
         </p:txBody>
       </p:sp>
@@ -6397,7 +6447,7 @@
           <a:noFill/>
         </p:spPr>
         <p:txBody>
-          <a:bodyPr wrap="square" anchor="t" lIns="0" rIns="0" tIns="0" bIns="0">
+          <a:bodyPr wrap="square" lIns="0" tIns="0" rIns="0" bIns="0" anchor="t">
             <a:spAutoFit/>
           </a:bodyPr>
           <a:lstStyle/>
@@ -6436,7 +6486,7 @@
           <a:noFill/>
         </p:spPr>
         <p:txBody>
-          <a:bodyPr wrap="square" anchor="t" lIns="0" rIns="0" tIns="0" bIns="0">
+          <a:bodyPr wrap="square" lIns="0" tIns="0" rIns="0" bIns="0" anchor="t">
             <a:spAutoFit/>
           </a:bodyPr>
           <a:lstStyle/>
@@ -6475,7 +6525,7 @@
           <a:noFill/>
         </p:spPr>
         <p:txBody>
-          <a:bodyPr wrap="square" anchor="t" lIns="0" rIns="0" tIns="0" bIns="0">
+          <a:bodyPr wrap="square" lIns="0" tIns="0" rIns="0" bIns="0" anchor="t">
             <a:spAutoFit/>
           </a:bodyPr>
           <a:lstStyle/>
@@ -6570,6 +6620,7 @@
           <a:lstStyle/>
           <a:p>
             <a:pPr algn="ctr"/>
+            <a:endParaRPr/>
           </a:p>
         </p:txBody>
       </p:sp>
@@ -6618,6 +6669,7 @@
           <a:lstStyle/>
           <a:p>
             <a:pPr algn="ctr"/>
+            <a:endParaRPr/>
           </a:p>
         </p:txBody>
       </p:sp>
@@ -6638,7 +6690,7 @@
           <a:noFill/>
         </p:spPr>
         <p:txBody>
-          <a:bodyPr wrap="square" anchor="t" lIns="0" rIns="0" tIns="0" bIns="0">
+          <a:bodyPr wrap="square" lIns="0" tIns="0" rIns="0" bIns="0" anchor="t">
             <a:spAutoFit/>
           </a:bodyPr>
           <a:lstStyle/>
@@ -6677,7 +6729,7 @@
           <a:noFill/>
         </p:spPr>
         <p:txBody>
-          <a:bodyPr wrap="square" anchor="t" lIns="0" rIns="0" tIns="0" bIns="0">
+          <a:bodyPr wrap="square" lIns="0" tIns="0" rIns="0" bIns="0" anchor="t">
             <a:spAutoFit/>
           </a:bodyPr>
           <a:lstStyle/>
@@ -6716,7 +6768,7 @@
           <a:noFill/>
         </p:spPr>
         <p:txBody>
-          <a:bodyPr wrap="square" anchor="t" lIns="0" rIns="0" tIns="0" bIns="0">
+          <a:bodyPr wrap="square" lIns="0" tIns="0" rIns="0" bIns="0" anchor="t">
             <a:spAutoFit/>
           </a:bodyPr>
           <a:lstStyle/>
@@ -6811,6 +6863,7 @@
           <a:lstStyle/>
           <a:p>
             <a:pPr algn="ctr"/>
+            <a:endParaRPr/>
           </a:p>
         </p:txBody>
       </p:sp>
@@ -6859,6 +6912,7 @@
           <a:lstStyle/>
           <a:p>
             <a:pPr algn="ctr"/>
+            <a:endParaRPr/>
           </a:p>
         </p:txBody>
       </p:sp>
@@ -6879,7 +6933,7 @@
           <a:noFill/>
         </p:spPr>
         <p:txBody>
-          <a:bodyPr wrap="square" anchor="t" lIns="0" rIns="0" tIns="0" bIns="0">
+          <a:bodyPr wrap="square" lIns="0" tIns="0" rIns="0" bIns="0" anchor="t">
             <a:spAutoFit/>
           </a:bodyPr>
           <a:lstStyle/>
@@ -6918,7 +6972,7 @@
           <a:noFill/>
         </p:spPr>
         <p:txBody>
-          <a:bodyPr wrap="square" anchor="t" lIns="0" rIns="0" tIns="0" bIns="0">
+          <a:bodyPr wrap="square" lIns="0" tIns="0" rIns="0" bIns="0" anchor="t">
             <a:spAutoFit/>
           </a:bodyPr>
           <a:lstStyle/>
@@ -6957,7 +7011,7 @@
           <a:noFill/>
         </p:spPr>
         <p:txBody>
-          <a:bodyPr wrap="square" anchor="t" lIns="0" rIns="0" tIns="0" bIns="0">
+          <a:bodyPr wrap="square" lIns="0" tIns="0" rIns="0" bIns="0" anchor="t">
             <a:spAutoFit/>
           </a:bodyPr>
           <a:lstStyle/>
@@ -7052,6 +7106,7 @@
           <a:lstStyle/>
           <a:p>
             <a:pPr algn="ctr"/>
+            <a:endParaRPr/>
           </a:p>
         </p:txBody>
       </p:sp>
@@ -7100,6 +7155,7 @@
           <a:lstStyle/>
           <a:p>
             <a:pPr algn="ctr"/>
+            <a:endParaRPr/>
           </a:p>
         </p:txBody>
       </p:sp>
@@ -7120,7 +7176,7 @@
           <a:noFill/>
         </p:spPr>
         <p:txBody>
-          <a:bodyPr wrap="square" anchor="t" lIns="0" rIns="0" tIns="0" bIns="0">
+          <a:bodyPr wrap="square" lIns="0" tIns="0" rIns="0" bIns="0" anchor="t">
             <a:spAutoFit/>
           </a:bodyPr>
           <a:lstStyle/>
@@ -7159,7 +7215,7 @@
           <a:noFill/>
         </p:spPr>
         <p:txBody>
-          <a:bodyPr wrap="square" anchor="t" lIns="0" rIns="0" tIns="0" bIns="0">
+          <a:bodyPr wrap="square" lIns="0" tIns="0" rIns="0" bIns="0" anchor="t">
             <a:spAutoFit/>
           </a:bodyPr>
           <a:lstStyle/>
@@ -7198,7 +7254,7 @@
           <a:noFill/>
         </p:spPr>
         <p:txBody>
-          <a:bodyPr wrap="square" anchor="t" lIns="0" rIns="0" tIns="0" bIns="0">
+          <a:bodyPr wrap="square" lIns="0" tIns="0" rIns="0" bIns="0" anchor="t">
             <a:spAutoFit/>
           </a:bodyPr>
           <a:lstStyle/>
@@ -7261,7 +7317,7 @@
 </file>
 
 <file path=ppt/slides/slide13.xml><?xml version="1.0" encoding="utf-8"?>
-<p:sld xmlns:a="http://schemas.openxmlformats.org/drawingml/2006/main" xmlns:p="http://schemas.openxmlformats.org/presentationml/2006/main" xmlns:r="http://schemas.openxmlformats.org/officeDocument/2006/relationships">
+<p:sld xmlns:a="http://schemas.openxmlformats.org/drawingml/2006/main" xmlns:r="http://schemas.openxmlformats.org/officeDocument/2006/relationships" xmlns:p="http://schemas.openxmlformats.org/presentationml/2006/main">
   <p:cSld>
     <p:spTree>
       <p:nvGrpSpPr>
@@ -7269,7 +7325,14 @@
         <p:cNvGrpSpPr/>
         <p:nvPr/>
       </p:nvGrpSpPr>
-      <p:grpSpPr/>
+      <p:grpSpPr>
+        <a:xfrm>
+          <a:off x="0" y="0"/>
+          <a:ext cx="0" cy="0"/>
+          <a:chOff x="0" y="0"/>
+          <a:chExt cx="0" cy="0"/>
+        </a:xfrm>
+      </p:grpSpPr>
       <p:sp>
         <p:nvSpPr>
           <p:cNvPr id="2" name="TextBox 1"/>
@@ -7287,7 +7350,7 @@
           <a:noFill/>
         </p:spPr>
         <p:txBody>
-          <a:bodyPr wrap="square" anchor="t" lIns="0" rIns="0" tIns="0" bIns="0">
+          <a:bodyPr wrap="square" lIns="0" tIns="0" rIns="0" bIns="0" anchor="t">
             <a:spAutoFit/>
           </a:bodyPr>
           <a:lstStyle/>
@@ -7326,7 +7389,7 @@
           <a:noFill/>
         </p:spPr>
         <p:txBody>
-          <a:bodyPr wrap="square" anchor="t" lIns="0" rIns="0" tIns="0" bIns="0">
+          <a:bodyPr wrap="square" lIns="0" tIns="0" rIns="0" bIns="0" anchor="t">
             <a:spAutoFit/>
           </a:bodyPr>
           <a:lstStyle/>
@@ -7389,6 +7452,7 @@
           <a:lstStyle/>
           <a:p>
             <a:pPr algn="ctr"/>
+            <a:endParaRPr/>
           </a:p>
         </p:txBody>
       </p:sp>
@@ -7433,6 +7497,7 @@
           <a:lstStyle/>
           <a:p>
             <a:pPr algn="ctr"/>
+            <a:endParaRPr/>
           </a:p>
         </p:txBody>
       </p:sp>
@@ -7453,7 +7518,7 @@
           <a:noFill/>
         </p:spPr>
         <p:txBody>
-          <a:bodyPr wrap="square" anchor="t" lIns="0" rIns="0" tIns="0" bIns="0">
+          <a:bodyPr wrap="square" lIns="0" tIns="0" rIns="0" bIns="0" anchor="t">
             <a:spAutoFit/>
           </a:bodyPr>
           <a:lstStyle/>
@@ -7492,7 +7557,7 @@
           <a:noFill/>
         </p:spPr>
         <p:txBody>
-          <a:bodyPr wrap="square" anchor="t" lIns="0" rIns="0" tIns="0" bIns="0">
+          <a:bodyPr wrap="square" lIns="0" tIns="0" rIns="0" bIns="0" anchor="t">
             <a:spAutoFit/>
           </a:bodyPr>
           <a:lstStyle/>
@@ -7553,7 +7618,7 @@
           </a:fontRef>
         </p:style>
         <p:txBody>
-          <a:bodyPr rtlCol="0" anchor="ctr" wrap="square" lIns="109728" rIns="109728" tIns="54864" bIns="54864"/>
+          <a:bodyPr wrap="square" lIns="109728" tIns="54864" rIns="109728" bIns="54864" rtlCol="0" anchor="ctr"/>
           <a:lstStyle/>
           <a:p>
             <a:pPr algn="ctr">
@@ -7606,7 +7671,7 @@
           <a:noFill/>
         </p:spPr>
         <p:txBody>
-          <a:bodyPr wrap="square" anchor="t" lIns="0" rIns="0" tIns="0" bIns="0">
+          <a:bodyPr wrap="square" lIns="0" tIns="0" rIns="0" bIns="0" anchor="t">
             <a:spAutoFit/>
           </a:bodyPr>
           <a:lstStyle/>
@@ -7667,7 +7732,7 @@
           </a:fontRef>
         </p:style>
         <p:txBody>
-          <a:bodyPr rtlCol="0" anchor="ctr" wrap="square" lIns="109728" rIns="109728" tIns="54864" bIns="54864"/>
+          <a:bodyPr wrap="square" lIns="109728" tIns="54864" rIns="109728" bIns="54864" rtlCol="0" anchor="ctr"/>
           <a:lstStyle/>
           <a:p>
             <a:pPr algn="ctr">
@@ -7720,7 +7785,7 @@
           <a:noFill/>
         </p:spPr>
         <p:txBody>
-          <a:bodyPr wrap="square" anchor="t" lIns="0" rIns="0" tIns="0" bIns="0">
+          <a:bodyPr wrap="square" lIns="0" tIns="0" rIns="0" bIns="0" anchor="t">
             <a:spAutoFit/>
           </a:bodyPr>
           <a:lstStyle/>
@@ -7781,7 +7846,7 @@
           </a:fontRef>
         </p:style>
         <p:txBody>
-          <a:bodyPr rtlCol="0" anchor="ctr" wrap="square" lIns="109728" rIns="109728" tIns="54864" bIns="54864"/>
+          <a:bodyPr wrap="square" lIns="109728" tIns="54864" rIns="109728" bIns="54864" rtlCol="0" anchor="ctr"/>
           <a:lstStyle/>
           <a:p>
             <a:pPr algn="ctr">
@@ -7834,7 +7899,7 @@
           <a:noFill/>
         </p:spPr>
         <p:txBody>
-          <a:bodyPr wrap="square" anchor="t" lIns="0" rIns="0" tIns="0" bIns="0">
+          <a:bodyPr wrap="square" lIns="0" tIns="0" rIns="0" bIns="0" anchor="t">
             <a:spAutoFit/>
           </a:bodyPr>
           <a:lstStyle/>
@@ -7895,7 +7960,7 @@
           </a:fontRef>
         </p:style>
         <p:txBody>
-          <a:bodyPr rtlCol="0" anchor="ctr" wrap="square" lIns="109728" rIns="109728" tIns="54864" bIns="54864"/>
+          <a:bodyPr wrap="square" lIns="109728" tIns="54864" rIns="109728" bIns="54864" rtlCol="0" anchor="ctr"/>
           <a:lstStyle/>
           <a:p>
             <a:pPr algn="ctr">
@@ -7954,7 +8019,7 @@
           </a:fontRef>
         </p:style>
         <p:txBody>
-          <a:bodyPr rtlCol="0" anchor="ctr" wrap="square" lIns="109728" rIns="109728" tIns="54864" bIns="54864"/>
+          <a:bodyPr wrap="square" lIns="109728" tIns="54864" rIns="109728" bIns="54864" rtlCol="0" anchor="ctr"/>
           <a:lstStyle/>
           <a:p>
             <a:pPr algn="ctr">
@@ -8013,7 +8078,7 @@
           </a:fontRef>
         </p:style>
         <p:txBody>
-          <a:bodyPr rtlCol="0" anchor="ctr" wrap="square" lIns="109728" rIns="109728" tIns="54864" bIns="54864"/>
+          <a:bodyPr wrap="square" lIns="109728" tIns="54864" rIns="109728" bIns="54864" rtlCol="0" anchor="ctr"/>
           <a:lstStyle/>
           <a:p>
             <a:pPr algn="ctr">
@@ -8072,7 +8137,7 @@
           </a:fontRef>
         </p:style>
         <p:txBody>
-          <a:bodyPr rtlCol="0" anchor="ctr" wrap="square" lIns="109728" rIns="109728" tIns="54864" bIns="54864"/>
+          <a:bodyPr wrap="square" lIns="109728" tIns="54864" rIns="109728" bIns="54864" rtlCol="0" anchor="ctr"/>
           <a:lstStyle/>
           <a:p>
             <a:pPr algn="ctr">
@@ -8131,7 +8196,7 @@
           </a:fontRef>
         </p:style>
         <p:txBody>
-          <a:bodyPr rtlCol="0" anchor="ctr" wrap="square" lIns="109728" rIns="109728" tIns="54864" bIns="54864"/>
+          <a:bodyPr wrap="square" lIns="109728" tIns="54864" rIns="109728" bIns="54864" rtlCol="0" anchor="ctr"/>
           <a:lstStyle/>
           <a:p>
             <a:pPr algn="ctr">
@@ -8160,7 +8225,7 @@
 </file>
 
 <file path=ppt/slides/slide14.xml><?xml version="1.0" encoding="utf-8"?>
-<p:sld xmlns:a="http://schemas.openxmlformats.org/drawingml/2006/main" xmlns:p="http://schemas.openxmlformats.org/presentationml/2006/main" xmlns:r="http://schemas.openxmlformats.org/officeDocument/2006/relationships">
+<p:sld xmlns:a="http://schemas.openxmlformats.org/drawingml/2006/main" xmlns:r="http://schemas.openxmlformats.org/officeDocument/2006/relationships" xmlns:p="http://schemas.openxmlformats.org/presentationml/2006/main">
   <p:cSld>
     <p:spTree>
       <p:nvGrpSpPr>
@@ -8168,7 +8233,14 @@
         <p:cNvGrpSpPr/>
         <p:nvPr/>
       </p:nvGrpSpPr>
-      <p:grpSpPr/>
+      <p:grpSpPr>
+        <a:xfrm>
+          <a:off x="0" y="0"/>
+          <a:ext cx="0" cy="0"/>
+          <a:chOff x="0" y="0"/>
+          <a:chExt cx="0" cy="0"/>
+        </a:xfrm>
+      </p:grpSpPr>
       <p:sp>
         <p:nvSpPr>
           <p:cNvPr id="2" name="TextBox 1"/>
@@ -8186,7 +8258,7 @@
           <a:noFill/>
         </p:spPr>
         <p:txBody>
-          <a:bodyPr wrap="square" anchor="t" lIns="0" rIns="0" tIns="0" bIns="0">
+          <a:bodyPr wrap="square" lIns="0" tIns="0" rIns="0" bIns="0" anchor="t">
             <a:spAutoFit/>
           </a:bodyPr>
           <a:lstStyle/>
@@ -8225,7 +8297,7 @@
           <a:noFill/>
         </p:spPr>
         <p:txBody>
-          <a:bodyPr wrap="square" anchor="t" lIns="0" rIns="0" tIns="0" bIns="0">
+          <a:bodyPr wrap="square" lIns="0" tIns="0" rIns="0" bIns="0" anchor="t">
             <a:spAutoFit/>
           </a:bodyPr>
           <a:lstStyle/>
@@ -8288,6 +8360,7 @@
           <a:lstStyle/>
           <a:p>
             <a:pPr algn="ctr"/>
+            <a:endParaRPr/>
           </a:p>
         </p:txBody>
       </p:sp>
@@ -8332,6 +8405,7 @@
           <a:lstStyle/>
           <a:p>
             <a:pPr algn="ctr"/>
+            <a:endParaRPr/>
           </a:p>
         </p:txBody>
       </p:sp>
@@ -8352,7 +8426,7 @@
           <a:noFill/>
         </p:spPr>
         <p:txBody>
-          <a:bodyPr wrap="square" anchor="t" lIns="0" rIns="0" tIns="0" bIns="0">
+          <a:bodyPr wrap="square" lIns="0" tIns="0" rIns="0" bIns="0" anchor="t">
             <a:spAutoFit/>
           </a:bodyPr>
           <a:lstStyle/>
@@ -8391,7 +8465,7 @@
           <a:noFill/>
         </p:spPr>
         <p:txBody>
-          <a:bodyPr wrap="square" anchor="t" lIns="0" rIns="0" tIns="0" bIns="0">
+          <a:bodyPr wrap="square" lIns="0" tIns="0" rIns="0" bIns="0" anchor="t">
             <a:spAutoFit/>
           </a:bodyPr>
           <a:lstStyle/>
@@ -8430,7 +8504,7 @@
           <a:noFill/>
         </p:spPr>
         <p:txBody>
-          <a:bodyPr wrap="square" anchor="t" lIns="0" rIns="0" tIns="0" bIns="0">
+          <a:bodyPr wrap="square" lIns="0" tIns="0" rIns="0" bIns="0" anchor="t">
             <a:spAutoFit/>
           </a:bodyPr>
           <a:lstStyle/>
@@ -8491,7 +8565,7 @@
           </a:fontRef>
         </p:style>
         <p:txBody>
-          <a:bodyPr rtlCol="0" anchor="ctr" wrap="square" lIns="109728" rIns="109728" tIns="54864" bIns="54864"/>
+          <a:bodyPr wrap="square" lIns="109728" tIns="54864" rIns="109728" bIns="54864" rtlCol="0" anchor="ctr"/>
           <a:lstStyle/>
           <a:p>
             <a:pPr algn="ctr">
@@ -8550,7 +8624,7 @@
           </a:fontRef>
         </p:style>
         <p:txBody>
-          <a:bodyPr rtlCol="0" anchor="ctr" wrap="square" lIns="109728" rIns="109728" tIns="54864" bIns="54864"/>
+          <a:bodyPr wrap="square" lIns="109728" tIns="54864" rIns="109728" bIns="54864" rtlCol="0" anchor="ctr"/>
           <a:lstStyle/>
           <a:p>
             <a:pPr algn="ctr">
@@ -8609,7 +8683,7 @@
           </a:fontRef>
         </p:style>
         <p:txBody>
-          <a:bodyPr rtlCol="0" anchor="ctr" wrap="square" lIns="109728" rIns="109728" tIns="54864" bIns="54864"/>
+          <a:bodyPr wrap="square" lIns="109728" tIns="54864" rIns="109728" bIns="54864" rtlCol="0" anchor="ctr"/>
           <a:lstStyle/>
           <a:p>
             <a:pPr algn="ctr">
@@ -8668,7 +8742,7 @@
           </a:fontRef>
         </p:style>
         <p:txBody>
-          <a:bodyPr rtlCol="0" anchor="ctr" wrap="square" lIns="109728" rIns="109728" tIns="54864" bIns="54864"/>
+          <a:bodyPr wrap="square" lIns="109728" tIns="54864" rIns="109728" bIns="54864" rtlCol="0" anchor="ctr"/>
           <a:lstStyle/>
           <a:p>
             <a:pPr algn="ctr">
@@ -8727,7 +8801,7 @@
           </a:fontRef>
         </p:style>
         <p:txBody>
-          <a:bodyPr rtlCol="0" anchor="ctr" wrap="square" lIns="109728" rIns="109728" tIns="54864" bIns="54864"/>
+          <a:bodyPr wrap="square" lIns="109728" tIns="54864" rIns="109728" bIns="54864" rtlCol="0" anchor="ctr"/>
           <a:lstStyle/>
           <a:p>
             <a:pPr algn="ctr">
@@ -8786,7 +8860,7 @@
           </a:fontRef>
         </p:style>
         <p:txBody>
-          <a:bodyPr rtlCol="0" anchor="ctr" wrap="square" lIns="109728" rIns="109728" tIns="54864" bIns="54864"/>
+          <a:bodyPr wrap="square" lIns="109728" tIns="54864" rIns="109728" bIns="54864" rtlCol="0" anchor="ctr"/>
           <a:lstStyle/>
           <a:p>
             <a:pPr algn="ctr">
@@ -8845,7 +8919,7 @@
           </a:fontRef>
         </p:style>
         <p:txBody>
-          <a:bodyPr rtlCol="0" anchor="ctr" wrap="square" lIns="109728" rIns="109728" tIns="54864" bIns="54864"/>
+          <a:bodyPr wrap="square" lIns="109728" tIns="54864" rIns="109728" bIns="54864" rtlCol="0" anchor="ctr"/>
           <a:lstStyle/>
           <a:p>
             <a:pPr algn="ctr">
@@ -8904,7 +8978,7 @@
           </a:fontRef>
         </p:style>
         <p:txBody>
-          <a:bodyPr rtlCol="0" anchor="ctr" wrap="square" lIns="109728" rIns="109728" tIns="54864" bIns="54864"/>
+          <a:bodyPr wrap="square" lIns="109728" tIns="54864" rIns="109728" bIns="54864" rtlCol="0" anchor="ctr"/>
           <a:lstStyle/>
           <a:p>
             <a:pPr algn="ctr">
@@ -8963,7 +9037,7 @@
           </a:fontRef>
         </p:style>
         <p:txBody>
-          <a:bodyPr rtlCol="0" anchor="ctr" wrap="square" lIns="109728" rIns="109728" tIns="54864" bIns="54864"/>
+          <a:bodyPr wrap="square" lIns="109728" tIns="54864" rIns="109728" bIns="54864" rtlCol="0" anchor="ctr"/>
           <a:lstStyle/>
           <a:p>
             <a:pPr algn="ctr">
@@ -9022,7 +9096,7 @@
           </a:fontRef>
         </p:style>
         <p:txBody>
-          <a:bodyPr rtlCol="0" anchor="ctr" wrap="square" lIns="109728" rIns="109728" tIns="54864" bIns="54864"/>
+          <a:bodyPr wrap="square" lIns="109728" tIns="54864" rIns="109728" bIns="54864" rtlCol="0" anchor="ctr"/>
           <a:lstStyle/>
           <a:p>
             <a:pPr algn="ctr">
@@ -9081,7 +9155,7 @@
           </a:fontRef>
         </p:style>
         <p:txBody>
-          <a:bodyPr rtlCol="0" anchor="ctr" wrap="square" lIns="109728" rIns="109728" tIns="54864" bIns="54864"/>
+          <a:bodyPr wrap="square" lIns="109728" tIns="54864" rIns="109728" bIns="54864" rtlCol="0" anchor="ctr"/>
           <a:lstStyle/>
           <a:p>
             <a:pPr algn="ctr">
@@ -9140,7 +9214,7 @@
           </a:fontRef>
         </p:style>
         <p:txBody>
-          <a:bodyPr rtlCol="0" anchor="ctr" wrap="square" lIns="109728" rIns="109728" tIns="54864" bIns="54864"/>
+          <a:bodyPr wrap="square" lIns="109728" tIns="54864" rIns="109728" bIns="54864" rtlCol="0" anchor="ctr"/>
           <a:lstStyle/>
           <a:p>
             <a:pPr algn="ctr">
@@ -9199,7 +9273,7 @@
           </a:fontRef>
         </p:style>
         <p:txBody>
-          <a:bodyPr rtlCol="0" anchor="ctr" wrap="square" lIns="109728" rIns="109728" tIns="54864" bIns="54864"/>
+          <a:bodyPr wrap="square" lIns="109728" tIns="54864" rIns="109728" bIns="54864" rtlCol="0" anchor="ctr"/>
           <a:lstStyle/>
           <a:p>
             <a:pPr algn="ctr">
@@ -9258,7 +9332,7 @@
           </a:fontRef>
         </p:style>
         <p:txBody>
-          <a:bodyPr rtlCol="0" anchor="ctr" wrap="square" lIns="109728" rIns="109728" tIns="54864" bIns="54864"/>
+          <a:bodyPr wrap="square" lIns="109728" tIns="54864" rIns="109728" bIns="54864" rtlCol="0" anchor="ctr"/>
           <a:lstStyle/>
           <a:p>
             <a:pPr algn="ctr">
@@ -9317,7 +9391,7 @@
           </a:fontRef>
         </p:style>
         <p:txBody>
-          <a:bodyPr rtlCol="0" anchor="ctr" wrap="square" lIns="109728" rIns="109728" tIns="54864" bIns="54864"/>
+          <a:bodyPr wrap="square" lIns="109728" tIns="54864" rIns="109728" bIns="54864" rtlCol="0" anchor="ctr"/>
           <a:lstStyle/>
           <a:p>
             <a:pPr algn="ctr">
@@ -9376,7 +9450,7 @@
           </a:fontRef>
         </p:style>
         <p:txBody>
-          <a:bodyPr rtlCol="0" anchor="ctr" wrap="square" lIns="109728" rIns="109728" tIns="54864" bIns="54864"/>
+          <a:bodyPr wrap="square" lIns="109728" tIns="54864" rIns="109728" bIns="54864" rtlCol="0" anchor="ctr"/>
           <a:lstStyle/>
           <a:p>
             <a:pPr algn="ctr">
@@ -9435,7 +9509,7 @@
           </a:fontRef>
         </p:style>
         <p:txBody>
-          <a:bodyPr rtlCol="0" anchor="ctr" wrap="square" lIns="109728" rIns="109728" tIns="54864" bIns="54864"/>
+          <a:bodyPr wrap="square" lIns="109728" tIns="54864" rIns="109728" bIns="54864" rtlCol="0" anchor="ctr"/>
           <a:lstStyle/>
           <a:p>
             <a:pPr algn="ctr">
@@ -9494,7 +9568,7 @@
           </a:fontRef>
         </p:style>
         <p:txBody>
-          <a:bodyPr rtlCol="0" anchor="ctr" wrap="square" lIns="109728" rIns="109728" tIns="54864" bIns="54864"/>
+          <a:bodyPr wrap="square" lIns="109728" tIns="54864" rIns="109728" bIns="54864" rtlCol="0" anchor="ctr"/>
           <a:lstStyle/>
           <a:p>
             <a:pPr algn="ctr">
@@ -9555,6 +9629,7 @@
           <a:lstStyle/>
           <a:p>
             <a:pPr algn="ctr"/>
+            <a:endParaRPr/>
           </a:p>
         </p:txBody>
       </p:sp>
@@ -9597,7 +9672,7 @@
           </a:fontRef>
         </p:style>
         <p:txBody>
-          <a:bodyPr rtlCol="0" anchor="ctr" wrap="square" lIns="109728" rIns="109728" tIns="54864" bIns="54864"/>
+          <a:bodyPr wrap="square" lIns="109728" tIns="54864" rIns="109728" bIns="54864" rtlCol="0" anchor="ctr"/>
           <a:lstStyle/>
           <a:p>
             <a:pPr algn="ctr">
@@ -9656,7 +9731,7 @@
           </a:fontRef>
         </p:style>
         <p:txBody>
-          <a:bodyPr rtlCol="0" anchor="ctr" wrap="square" lIns="109728" rIns="109728" tIns="54864" bIns="54864"/>
+          <a:bodyPr wrap="square" lIns="109728" tIns="54864" rIns="109728" bIns="54864" rtlCol="0" anchor="ctr"/>
           <a:lstStyle/>
           <a:p>
             <a:pPr algn="ctr">
@@ -9715,7 +9790,7 @@
           </a:fontRef>
         </p:style>
         <p:txBody>
-          <a:bodyPr rtlCol="0" anchor="ctr" wrap="square" lIns="109728" rIns="109728" tIns="54864" bIns="54864"/>
+          <a:bodyPr wrap="square" lIns="109728" tIns="54864" rIns="109728" bIns="54864" rtlCol="0" anchor="ctr"/>
           <a:lstStyle/>
           <a:p>
             <a:pPr algn="ctr">
@@ -9774,7 +9849,7 @@
           </a:fontRef>
         </p:style>
         <p:txBody>
-          <a:bodyPr rtlCol="0" anchor="ctr" wrap="square" lIns="109728" rIns="109728" tIns="54864" bIns="54864"/>
+          <a:bodyPr wrap="square" lIns="109728" tIns="54864" rIns="109728" bIns="54864" rtlCol="0" anchor="ctr"/>
           <a:lstStyle/>
           <a:p>
             <a:pPr algn="ctr">
@@ -9833,7 +9908,7 @@
           </a:fontRef>
         </p:style>
         <p:txBody>
-          <a:bodyPr rtlCol="0" anchor="ctr" wrap="square" lIns="109728" rIns="109728" tIns="54864" bIns="54864"/>
+          <a:bodyPr wrap="square" lIns="109728" tIns="54864" rIns="109728" bIns="54864" rtlCol="0" anchor="ctr"/>
           <a:lstStyle/>
           <a:p>
             <a:pPr algn="ctr">
@@ -9870,7 +9945,7 @@
           <a:noFill/>
         </p:spPr>
         <p:txBody>
-          <a:bodyPr wrap="square" anchor="t" lIns="0" rIns="0" tIns="0" bIns="0">
+          <a:bodyPr wrap="square" lIns="0" tIns="0" rIns="0" bIns="0" anchor="t">
             <a:spAutoFit/>
           </a:bodyPr>
           <a:lstStyle/>
@@ -9901,7 +9976,7 @@
 </file>
 
 <file path=ppt/slides/slide15.xml><?xml version="1.0" encoding="utf-8"?>
-<p:sld xmlns:a="http://schemas.openxmlformats.org/drawingml/2006/main" xmlns:p="http://schemas.openxmlformats.org/presentationml/2006/main" xmlns:r="http://schemas.openxmlformats.org/officeDocument/2006/relationships">
+<p:sld xmlns:a="http://schemas.openxmlformats.org/drawingml/2006/main" xmlns:r="http://schemas.openxmlformats.org/officeDocument/2006/relationships" xmlns:p="http://schemas.openxmlformats.org/presentationml/2006/main">
   <p:cSld>
     <p:spTree>
       <p:nvGrpSpPr>
@@ -9909,7 +9984,14 @@
         <p:cNvGrpSpPr/>
         <p:nvPr/>
       </p:nvGrpSpPr>
-      <p:grpSpPr/>
+      <p:grpSpPr>
+        <a:xfrm>
+          <a:off x="0" y="0"/>
+          <a:ext cx="0" cy="0"/>
+          <a:chOff x="0" y="0"/>
+          <a:chExt cx="0" cy="0"/>
+        </a:xfrm>
+      </p:grpSpPr>
       <p:sp>
         <p:nvSpPr>
           <p:cNvPr id="2" name="TextBox 1"/>
@@ -9927,7 +10009,7 @@
           <a:noFill/>
         </p:spPr>
         <p:txBody>
-          <a:bodyPr wrap="square" anchor="t" lIns="0" rIns="0" tIns="0" bIns="0">
+          <a:bodyPr wrap="square" lIns="0" tIns="0" rIns="0" bIns="0" anchor="t">
             <a:spAutoFit/>
           </a:bodyPr>
           <a:lstStyle/>
@@ -9966,7 +10048,7 @@
           <a:noFill/>
         </p:spPr>
         <p:txBody>
-          <a:bodyPr wrap="square" anchor="t" lIns="0" rIns="0" tIns="0" bIns="0">
+          <a:bodyPr wrap="square" lIns="0" tIns="0" rIns="0" bIns="0" anchor="t">
             <a:spAutoFit/>
           </a:bodyPr>
           <a:lstStyle/>
@@ -10029,6 +10111,7 @@
           <a:lstStyle/>
           <a:p>
             <a:pPr algn="ctr"/>
+            <a:endParaRPr/>
           </a:p>
         </p:txBody>
       </p:sp>
@@ -10073,6 +10156,7 @@
           <a:lstStyle/>
           <a:p>
             <a:pPr algn="ctr"/>
+            <a:endParaRPr/>
           </a:p>
         </p:txBody>
       </p:sp>
@@ -10093,7 +10177,7 @@
           <a:noFill/>
         </p:spPr>
         <p:txBody>
-          <a:bodyPr wrap="square" anchor="t" lIns="0" rIns="0" tIns="0" bIns="0">
+          <a:bodyPr wrap="square" lIns="0" tIns="0" rIns="0" bIns="0" anchor="t">
             <a:spAutoFit/>
           </a:bodyPr>
           <a:lstStyle/>
@@ -10132,7 +10216,7 @@
           <a:noFill/>
         </p:spPr>
         <p:txBody>
-          <a:bodyPr wrap="square" anchor="t" lIns="0" rIns="0" tIns="0" bIns="0">
+          <a:bodyPr wrap="square" lIns="0" tIns="0" rIns="0" bIns="0" anchor="t">
             <a:spAutoFit/>
           </a:bodyPr>
           <a:lstStyle/>
@@ -10193,7 +10277,7 @@
           </a:fontRef>
         </p:style>
         <p:txBody>
-          <a:bodyPr rtlCol="0" anchor="ctr" wrap="square" lIns="109728" rIns="109728" tIns="54864" bIns="54864"/>
+          <a:bodyPr wrap="square" lIns="109728" tIns="54864" rIns="109728" bIns="54864" rtlCol="0" anchor="ctr"/>
           <a:lstStyle/>
           <a:p>
             <a:pPr algn="l">
@@ -10258,6 +10342,7 @@
           <a:lstStyle/>
           <a:p>
             <a:pPr algn="ctr"/>
+            <a:endParaRPr/>
           </a:p>
         </p:txBody>
       </p:sp>
@@ -10278,7 +10363,7 @@
           <a:noFill/>
         </p:spPr>
         <p:txBody>
-          <a:bodyPr wrap="square" anchor="t" lIns="0" rIns="0" tIns="0" bIns="0">
+          <a:bodyPr wrap="square" lIns="0" tIns="0" rIns="0" bIns="0" anchor="t">
             <a:spAutoFit/>
           </a:bodyPr>
           <a:lstStyle/>
@@ -10451,7 +10536,7 @@
           </a:fontRef>
         </p:style>
         <p:txBody>
-          <a:bodyPr rtlCol="0" anchor="ctr" wrap="square" lIns="109728" rIns="109728" tIns="54864" bIns="54864"/>
+          <a:bodyPr wrap="square" lIns="109728" tIns="54864" rIns="109728" bIns="54864" rtlCol="0" anchor="ctr"/>
           <a:lstStyle/>
           <a:p>
             <a:pPr algn="l">
@@ -10516,6 +10601,7 @@
           <a:lstStyle/>
           <a:p>
             <a:pPr algn="ctr"/>
+            <a:endParaRPr/>
           </a:p>
         </p:txBody>
       </p:sp>
@@ -10536,7 +10622,7 @@
           <a:noFill/>
         </p:spPr>
         <p:txBody>
-          <a:bodyPr wrap="square" anchor="t" lIns="0" rIns="0" tIns="0" bIns="0">
+          <a:bodyPr wrap="square" lIns="0" tIns="0" rIns="0" bIns="0" anchor="t">
             <a:spAutoFit/>
           </a:bodyPr>
           <a:lstStyle/>
@@ -10709,7 +10795,7 @@
           </a:fontRef>
         </p:style>
         <p:txBody>
-          <a:bodyPr rtlCol="0" anchor="ctr" wrap="square" lIns="109728" rIns="109728" tIns="54864" bIns="54864"/>
+          <a:bodyPr wrap="square" lIns="109728" tIns="54864" rIns="109728" bIns="54864" rtlCol="0" anchor="ctr"/>
           <a:lstStyle/>
           <a:p>
             <a:pPr algn="ctr">
@@ -10738,7 +10824,7 @@
 </file>
 
 <file path=ppt/slides/slide16.xml><?xml version="1.0" encoding="utf-8"?>
-<p:sld xmlns:a="http://schemas.openxmlformats.org/drawingml/2006/main" xmlns:p="http://schemas.openxmlformats.org/presentationml/2006/main" xmlns:r="http://schemas.openxmlformats.org/officeDocument/2006/relationships">
+<p:sld xmlns:a="http://schemas.openxmlformats.org/drawingml/2006/main" xmlns:r="http://schemas.openxmlformats.org/officeDocument/2006/relationships" xmlns:p="http://schemas.openxmlformats.org/presentationml/2006/main">
   <p:cSld>
     <p:spTree>
       <p:nvGrpSpPr>
@@ -10746,7 +10832,14 @@
         <p:cNvGrpSpPr/>
         <p:nvPr/>
       </p:nvGrpSpPr>
-      <p:grpSpPr/>
+      <p:grpSpPr>
+        <a:xfrm>
+          <a:off x="0" y="0"/>
+          <a:ext cx="0" cy="0"/>
+          <a:chOff x="0" y="0"/>
+          <a:chExt cx="0" cy="0"/>
+        </a:xfrm>
+      </p:grpSpPr>
       <p:sp>
         <p:nvSpPr>
           <p:cNvPr id="2" name="TextBox 1"/>
@@ -10764,7 +10857,7 @@
           <a:noFill/>
         </p:spPr>
         <p:txBody>
-          <a:bodyPr wrap="square" anchor="t" lIns="0" rIns="0" tIns="0" bIns="0">
+          <a:bodyPr wrap="square" lIns="0" tIns="0" rIns="0" bIns="0" anchor="t">
             <a:spAutoFit/>
           </a:bodyPr>
           <a:lstStyle/>
@@ -10803,7 +10896,7 @@
           <a:noFill/>
         </p:spPr>
         <p:txBody>
-          <a:bodyPr wrap="square" anchor="t" lIns="0" rIns="0" tIns="0" bIns="0">
+          <a:bodyPr wrap="square" lIns="0" tIns="0" rIns="0" bIns="0" anchor="t">
             <a:spAutoFit/>
           </a:bodyPr>
           <a:lstStyle/>
@@ -10866,6 +10959,7 @@
           <a:lstStyle/>
           <a:p>
             <a:pPr algn="ctr"/>
+            <a:endParaRPr/>
           </a:p>
         </p:txBody>
       </p:sp>
@@ -10910,6 +11004,7 @@
           <a:lstStyle/>
           <a:p>
             <a:pPr algn="ctr"/>
+            <a:endParaRPr/>
           </a:p>
         </p:txBody>
       </p:sp>
@@ -10930,7 +11025,7 @@
           <a:noFill/>
         </p:spPr>
         <p:txBody>
-          <a:bodyPr wrap="square" anchor="t" lIns="0" rIns="0" tIns="0" bIns="0">
+          <a:bodyPr wrap="square" lIns="0" tIns="0" rIns="0" bIns="0" anchor="t">
             <a:spAutoFit/>
           </a:bodyPr>
           <a:lstStyle/>
@@ -10969,7 +11064,7 @@
           <a:noFill/>
         </p:spPr>
         <p:txBody>
-          <a:bodyPr wrap="square" anchor="t" lIns="0" rIns="0" tIns="0" bIns="0">
+          <a:bodyPr wrap="square" lIns="0" tIns="0" rIns="0" bIns="0" anchor="t">
             <a:spAutoFit/>
           </a:bodyPr>
           <a:lstStyle/>
@@ -11036,6 +11131,7 @@
           <a:lstStyle/>
           <a:p>
             <a:pPr algn="ctr"/>
+            <a:endParaRPr/>
           </a:p>
         </p:txBody>
       </p:sp>
@@ -11080,6 +11176,7 @@
           <a:lstStyle/>
           <a:p>
             <a:pPr algn="ctr"/>
+            <a:endParaRPr/>
           </a:p>
         </p:txBody>
       </p:sp>
@@ -11100,7 +11197,7 @@
           <a:noFill/>
         </p:spPr>
         <p:txBody>
-          <a:bodyPr wrap="square" anchor="t" lIns="0" rIns="0" tIns="0" bIns="0">
+          <a:bodyPr wrap="square" lIns="0" tIns="0" rIns="0" bIns="0" anchor="t">
             <a:spAutoFit/>
           </a:bodyPr>
           <a:lstStyle/>
@@ -11139,7 +11236,7 @@
           <a:noFill/>
         </p:spPr>
         <p:txBody>
-          <a:bodyPr wrap="square" anchor="t" lIns="0" rIns="0" tIns="0" bIns="0">
+          <a:bodyPr wrap="square" lIns="0" tIns="0" rIns="0" bIns="0" anchor="t">
             <a:spAutoFit/>
           </a:bodyPr>
           <a:lstStyle/>
@@ -11206,6 +11303,7 @@
           <a:lstStyle/>
           <a:p>
             <a:pPr algn="ctr"/>
+            <a:endParaRPr/>
           </a:p>
         </p:txBody>
       </p:sp>
@@ -11250,6 +11348,7 @@
           <a:lstStyle/>
           <a:p>
             <a:pPr algn="ctr"/>
+            <a:endParaRPr/>
           </a:p>
         </p:txBody>
       </p:sp>
@@ -11270,7 +11369,7 @@
           <a:noFill/>
         </p:spPr>
         <p:txBody>
-          <a:bodyPr wrap="square" anchor="t" lIns="0" rIns="0" tIns="0" bIns="0">
+          <a:bodyPr wrap="square" lIns="0" tIns="0" rIns="0" bIns="0" anchor="t">
             <a:spAutoFit/>
           </a:bodyPr>
           <a:lstStyle/>
@@ -11309,7 +11408,7 @@
           <a:noFill/>
         </p:spPr>
         <p:txBody>
-          <a:bodyPr wrap="square" anchor="t" lIns="0" rIns="0" tIns="0" bIns="0">
+          <a:bodyPr wrap="square" lIns="0" tIns="0" rIns="0" bIns="0" anchor="t">
             <a:spAutoFit/>
           </a:bodyPr>
           <a:lstStyle/>
@@ -11376,6 +11475,7 @@
           <a:lstStyle/>
           <a:p>
             <a:pPr algn="ctr"/>
+            <a:endParaRPr/>
           </a:p>
         </p:txBody>
       </p:sp>
@@ -11420,6 +11520,7 @@
           <a:lstStyle/>
           <a:p>
             <a:pPr algn="ctr"/>
+            <a:endParaRPr/>
           </a:p>
         </p:txBody>
       </p:sp>
@@ -11440,7 +11541,7 @@
           <a:noFill/>
         </p:spPr>
         <p:txBody>
-          <a:bodyPr wrap="square" anchor="t" lIns="0" rIns="0" tIns="0" bIns="0">
+          <a:bodyPr wrap="square" lIns="0" tIns="0" rIns="0" bIns="0" anchor="t">
             <a:spAutoFit/>
           </a:bodyPr>
           <a:lstStyle/>
@@ -11479,7 +11580,7 @@
           <a:noFill/>
         </p:spPr>
         <p:txBody>
-          <a:bodyPr wrap="square" anchor="t" lIns="0" rIns="0" tIns="0" bIns="0">
+          <a:bodyPr wrap="square" lIns="0" tIns="0" rIns="0" bIns="0" anchor="t">
             <a:spAutoFit/>
           </a:bodyPr>
           <a:lstStyle/>
@@ -11546,6 +11647,7 @@
           <a:lstStyle/>
           <a:p>
             <a:pPr algn="ctr"/>
+            <a:endParaRPr/>
           </a:p>
         </p:txBody>
       </p:sp>
@@ -11590,6 +11692,7 @@
           <a:lstStyle/>
           <a:p>
             <a:pPr algn="ctr"/>
+            <a:endParaRPr/>
           </a:p>
         </p:txBody>
       </p:sp>
@@ -11610,7 +11713,7 @@
           <a:noFill/>
         </p:spPr>
         <p:txBody>
-          <a:bodyPr wrap="square" anchor="t" lIns="0" rIns="0" tIns="0" bIns="0">
+          <a:bodyPr wrap="square" lIns="0" tIns="0" rIns="0" bIns="0" anchor="t">
             <a:spAutoFit/>
           </a:bodyPr>
           <a:lstStyle/>
@@ -11649,7 +11752,7 @@
           <a:noFill/>
         </p:spPr>
         <p:txBody>
-          <a:bodyPr wrap="square" anchor="t" lIns="0" rIns="0" tIns="0" bIns="0">
+          <a:bodyPr wrap="square" lIns="0" tIns="0" rIns="0" bIns="0" anchor="t">
             <a:spAutoFit/>
           </a:bodyPr>
           <a:lstStyle/>
@@ -11716,6 +11819,7 @@
           <a:lstStyle/>
           <a:p>
             <a:pPr algn="ctr"/>
+            <a:endParaRPr/>
           </a:p>
         </p:txBody>
       </p:sp>
@@ -11760,6 +11864,7 @@
           <a:lstStyle/>
           <a:p>
             <a:pPr algn="ctr"/>
+            <a:endParaRPr/>
           </a:p>
         </p:txBody>
       </p:sp>
@@ -11780,7 +11885,7 @@
           <a:noFill/>
         </p:spPr>
         <p:txBody>
-          <a:bodyPr wrap="square" anchor="t" lIns="0" rIns="0" tIns="0" bIns="0">
+          <a:bodyPr wrap="square" lIns="0" tIns="0" rIns="0" bIns="0" anchor="t">
             <a:spAutoFit/>
           </a:bodyPr>
           <a:lstStyle/>
@@ -11819,7 +11924,7 @@
           <a:noFill/>
         </p:spPr>
         <p:txBody>
-          <a:bodyPr wrap="square" anchor="t" lIns="0" rIns="0" tIns="0" bIns="0">
+          <a:bodyPr wrap="square" lIns="0" tIns="0" rIns="0" bIns="0" anchor="t">
             <a:spAutoFit/>
           </a:bodyPr>
           <a:lstStyle/>
@@ -11886,6 +11991,7 @@
           <a:lstStyle/>
           <a:p>
             <a:pPr algn="ctr"/>
+            <a:endParaRPr/>
           </a:p>
         </p:txBody>
       </p:sp>
@@ -11930,6 +12036,7 @@
           <a:lstStyle/>
           <a:p>
             <a:pPr algn="ctr"/>
+            <a:endParaRPr/>
           </a:p>
         </p:txBody>
       </p:sp>
@@ -11950,7 +12057,7 @@
           <a:noFill/>
         </p:spPr>
         <p:txBody>
-          <a:bodyPr wrap="square" anchor="t" lIns="0" rIns="0" tIns="0" bIns="0">
+          <a:bodyPr wrap="square" lIns="0" tIns="0" rIns="0" bIns="0" anchor="t">
             <a:spAutoFit/>
           </a:bodyPr>
           <a:lstStyle/>
@@ -11989,7 +12096,7 @@
           <a:noFill/>
         </p:spPr>
         <p:txBody>
-          <a:bodyPr wrap="square" anchor="t" lIns="0" rIns="0" tIns="0" bIns="0">
+          <a:bodyPr wrap="square" lIns="0" tIns="0" rIns="0" bIns="0" anchor="t">
             <a:spAutoFit/>
           </a:bodyPr>
           <a:lstStyle/>
@@ -12056,6 +12163,7 @@
           <a:lstStyle/>
           <a:p>
             <a:pPr algn="ctr"/>
+            <a:endParaRPr/>
           </a:p>
         </p:txBody>
       </p:sp>
@@ -12100,6 +12208,7 @@
           <a:lstStyle/>
           <a:p>
             <a:pPr algn="ctr"/>
+            <a:endParaRPr/>
           </a:p>
         </p:txBody>
       </p:sp>
@@ -12120,7 +12229,7 @@
           <a:noFill/>
         </p:spPr>
         <p:txBody>
-          <a:bodyPr wrap="square" anchor="t" lIns="0" rIns="0" tIns="0" bIns="0">
+          <a:bodyPr wrap="square" lIns="0" tIns="0" rIns="0" bIns="0" anchor="t">
             <a:spAutoFit/>
           </a:bodyPr>
           <a:lstStyle/>
@@ -12159,7 +12268,7 @@
           <a:noFill/>
         </p:spPr>
         <p:txBody>
-          <a:bodyPr wrap="square" anchor="t" lIns="0" rIns="0" tIns="0" bIns="0">
+          <a:bodyPr wrap="square" lIns="0" tIns="0" rIns="0" bIns="0" anchor="t">
             <a:spAutoFit/>
           </a:bodyPr>
           <a:lstStyle/>
@@ -12226,6 +12335,7 @@
           <a:lstStyle/>
           <a:p>
             <a:pPr algn="ctr"/>
+            <a:endParaRPr/>
           </a:p>
         </p:txBody>
       </p:sp>
@@ -12270,6 +12380,7 @@
           <a:lstStyle/>
           <a:p>
             <a:pPr algn="ctr"/>
+            <a:endParaRPr/>
           </a:p>
         </p:txBody>
       </p:sp>
@@ -12290,7 +12401,7 @@
           <a:noFill/>
         </p:spPr>
         <p:txBody>
-          <a:bodyPr wrap="square" anchor="t" lIns="0" rIns="0" tIns="0" bIns="0">
+          <a:bodyPr wrap="square" lIns="0" tIns="0" rIns="0" bIns="0" anchor="t">
             <a:spAutoFit/>
           </a:bodyPr>
           <a:lstStyle/>
@@ -12329,7 +12440,7 @@
           <a:noFill/>
         </p:spPr>
         <p:txBody>
-          <a:bodyPr wrap="square" anchor="t" lIns="0" rIns="0" tIns="0" bIns="0">
+          <a:bodyPr wrap="square" lIns="0" tIns="0" rIns="0" bIns="0" anchor="t">
             <a:spAutoFit/>
           </a:bodyPr>
           <a:lstStyle/>
@@ -12360,7 +12471,7 @@
 </file>
 
 <file path=ppt/slides/slide17.xml><?xml version="1.0" encoding="utf-8"?>
-<p:sld xmlns:a="http://schemas.openxmlformats.org/drawingml/2006/main" xmlns:p="http://schemas.openxmlformats.org/presentationml/2006/main" xmlns:r="http://schemas.openxmlformats.org/officeDocument/2006/relationships">
+<p:sld xmlns:a="http://schemas.openxmlformats.org/drawingml/2006/main" xmlns:r="http://schemas.openxmlformats.org/officeDocument/2006/relationships" xmlns:p="http://schemas.openxmlformats.org/presentationml/2006/main">
   <p:cSld>
     <p:spTree>
       <p:nvGrpSpPr>
@@ -12368,7 +12479,14 @@
         <p:cNvGrpSpPr/>
         <p:nvPr/>
       </p:nvGrpSpPr>
-      <p:grpSpPr/>
+      <p:grpSpPr>
+        <a:xfrm>
+          <a:off x="0" y="0"/>
+          <a:ext cx="0" cy="0"/>
+          <a:chOff x="0" y="0"/>
+          <a:chExt cx="0" cy="0"/>
+        </a:xfrm>
+      </p:grpSpPr>
       <p:sp>
         <p:nvSpPr>
           <p:cNvPr id="2" name="TextBox 1"/>
@@ -12386,7 +12504,7 @@
           <a:noFill/>
         </p:spPr>
         <p:txBody>
-          <a:bodyPr wrap="square" anchor="t" lIns="0" rIns="0" tIns="0" bIns="0">
+          <a:bodyPr wrap="square" lIns="0" tIns="0" rIns="0" bIns="0" anchor="t">
             <a:spAutoFit/>
           </a:bodyPr>
           <a:lstStyle/>
@@ -12425,7 +12543,7 @@
           <a:noFill/>
         </p:spPr>
         <p:txBody>
-          <a:bodyPr wrap="square" anchor="t" lIns="0" rIns="0" tIns="0" bIns="0">
+          <a:bodyPr wrap="square" lIns="0" tIns="0" rIns="0" bIns="0" anchor="t">
             <a:spAutoFit/>
           </a:bodyPr>
           <a:lstStyle/>
@@ -12488,6 +12606,7 @@
           <a:lstStyle/>
           <a:p>
             <a:pPr algn="ctr"/>
+            <a:endParaRPr/>
           </a:p>
         </p:txBody>
       </p:sp>
@@ -12532,6 +12651,7 @@
           <a:lstStyle/>
           <a:p>
             <a:pPr algn="ctr"/>
+            <a:endParaRPr/>
           </a:p>
         </p:txBody>
       </p:sp>
@@ -12552,7 +12672,7 @@
           <a:noFill/>
         </p:spPr>
         <p:txBody>
-          <a:bodyPr wrap="square" anchor="t" lIns="0" rIns="0" tIns="0" bIns="0">
+          <a:bodyPr wrap="square" lIns="0" tIns="0" rIns="0" bIns="0" anchor="t">
             <a:spAutoFit/>
           </a:bodyPr>
           <a:lstStyle/>
@@ -12591,7 +12711,7 @@
           <a:noFill/>
         </p:spPr>
         <p:txBody>
-          <a:bodyPr wrap="square" anchor="t" lIns="0" rIns="0" tIns="0" bIns="0">
+          <a:bodyPr wrap="square" lIns="0" tIns="0" rIns="0" bIns="0" anchor="t">
             <a:spAutoFit/>
           </a:bodyPr>
           <a:lstStyle/>
@@ -12652,7 +12772,7 @@
           </a:fontRef>
         </p:style>
         <p:txBody>
-          <a:bodyPr rtlCol="0" anchor="ctr" wrap="square"/>
+          <a:bodyPr wrap="square" rtlCol="0" anchor="ctr"/>
           <a:lstStyle/>
           <a:p>
             <a:pPr algn="ctr"/>
@@ -12697,7 +12817,7 @@
           <a:noFill/>
         </p:spPr>
         <p:txBody>
-          <a:bodyPr wrap="square" anchor="t" lIns="0" rIns="0" tIns="0" bIns="0">
+          <a:bodyPr wrap="square" lIns="0" tIns="0" rIns="0" bIns="0" anchor="t">
             <a:spAutoFit/>
           </a:bodyPr>
           <a:lstStyle/>
@@ -12758,7 +12878,7 @@
           </a:fontRef>
         </p:style>
         <p:txBody>
-          <a:bodyPr rtlCol="0" anchor="ctr" wrap="square"/>
+          <a:bodyPr wrap="square" rtlCol="0" anchor="ctr"/>
           <a:lstStyle/>
           <a:p>
             <a:pPr algn="ctr"/>
@@ -12803,7 +12923,7 @@
           <a:noFill/>
         </p:spPr>
         <p:txBody>
-          <a:bodyPr wrap="square" anchor="t" lIns="0" rIns="0" tIns="0" bIns="0">
+          <a:bodyPr wrap="square" lIns="0" tIns="0" rIns="0" bIns="0" anchor="t">
             <a:spAutoFit/>
           </a:bodyPr>
           <a:lstStyle/>
@@ -12864,7 +12984,7 @@
           </a:fontRef>
         </p:style>
         <p:txBody>
-          <a:bodyPr rtlCol="0" anchor="ctr" wrap="square"/>
+          <a:bodyPr wrap="square" rtlCol="0" anchor="ctr"/>
           <a:lstStyle/>
           <a:p>
             <a:pPr algn="ctr"/>
@@ -12931,7 +13051,7 @@
           </a:fontRef>
         </p:style>
         <p:txBody>
-          <a:bodyPr rtlCol="0" anchor="ctr" wrap="square" lIns="109728" rIns="109728" tIns="54864" bIns="54864"/>
+          <a:bodyPr wrap="square" lIns="109728" tIns="54864" rIns="109728" bIns="54864" rtlCol="0" anchor="ctr"/>
           <a:lstStyle/>
           <a:p>
             <a:pPr algn="ctr">
@@ -13006,7 +13126,7 @@
           </a:fontRef>
         </p:style>
         <p:txBody>
-          <a:bodyPr rtlCol="0" anchor="ctr" wrap="square" lIns="109728" rIns="109728" tIns="54864" bIns="54864"/>
+          <a:bodyPr wrap="square" lIns="109728" tIns="54864" rIns="109728" bIns="54864" rtlCol="0" anchor="ctr"/>
           <a:lstStyle/>
           <a:p>
             <a:pPr algn="ctr">
@@ -13081,7 +13201,7 @@
           </a:fontRef>
         </p:style>
         <p:txBody>
-          <a:bodyPr rtlCol="0" anchor="ctr" wrap="square" lIns="109728" rIns="109728" tIns="54864" bIns="54864"/>
+          <a:bodyPr wrap="square" lIns="109728" tIns="54864" rIns="109728" bIns="54864" rtlCol="0" anchor="ctr"/>
           <a:lstStyle/>
           <a:p>
             <a:pPr algn="ctr">
@@ -13156,7 +13276,7 @@
           </a:fontRef>
         </p:style>
         <p:txBody>
-          <a:bodyPr rtlCol="0" anchor="ctr" wrap="square" lIns="109728" rIns="109728" tIns="54864" bIns="54864"/>
+          <a:bodyPr wrap="square" lIns="109728" tIns="54864" rIns="109728" bIns="54864" rtlCol="0" anchor="ctr"/>
           <a:lstStyle/>
           <a:p>
             <a:pPr algn="ctr">
@@ -13201,7 +13321,7 @@
 </file>
 
 <file path=ppt/slides/slide18.xml><?xml version="1.0" encoding="utf-8"?>
-<p:sld xmlns:a="http://schemas.openxmlformats.org/drawingml/2006/main" xmlns:p="http://schemas.openxmlformats.org/presentationml/2006/main" xmlns:r="http://schemas.openxmlformats.org/officeDocument/2006/relationships">
+<p:sld xmlns:a="http://schemas.openxmlformats.org/drawingml/2006/main" xmlns:r="http://schemas.openxmlformats.org/officeDocument/2006/relationships" xmlns:p="http://schemas.openxmlformats.org/presentationml/2006/main">
   <p:cSld>
     <p:spTree>
       <p:nvGrpSpPr>
@@ -13209,7 +13329,14 @@
         <p:cNvGrpSpPr/>
         <p:nvPr/>
       </p:nvGrpSpPr>
-      <p:grpSpPr/>
+      <p:grpSpPr>
+        <a:xfrm>
+          <a:off x="0" y="0"/>
+          <a:ext cx="0" cy="0"/>
+          <a:chOff x="0" y="0"/>
+          <a:chExt cx="0" cy="0"/>
+        </a:xfrm>
+      </p:grpSpPr>
       <p:sp>
         <p:nvSpPr>
           <p:cNvPr id="2" name="TextBox 1"/>
@@ -13227,7 +13354,7 @@
           <a:noFill/>
         </p:spPr>
         <p:txBody>
-          <a:bodyPr wrap="square" anchor="t" lIns="0" rIns="0" tIns="0" bIns="0">
+          <a:bodyPr wrap="square" lIns="0" tIns="0" rIns="0" bIns="0" anchor="t">
             <a:spAutoFit/>
           </a:bodyPr>
           <a:lstStyle/>
@@ -13266,7 +13393,7 @@
           <a:noFill/>
         </p:spPr>
         <p:txBody>
-          <a:bodyPr wrap="square" anchor="t" lIns="0" rIns="0" tIns="0" bIns="0">
+          <a:bodyPr wrap="square" lIns="0" tIns="0" rIns="0" bIns="0" anchor="t">
             <a:spAutoFit/>
           </a:bodyPr>
           <a:lstStyle/>
@@ -13329,6 +13456,7 @@
           <a:lstStyle/>
           <a:p>
             <a:pPr algn="ctr"/>
+            <a:endParaRPr/>
           </a:p>
         </p:txBody>
       </p:sp>
@@ -13373,6 +13501,7 @@
           <a:lstStyle/>
           <a:p>
             <a:pPr algn="ctr"/>
+            <a:endParaRPr/>
           </a:p>
         </p:txBody>
       </p:sp>
@@ -13393,7 +13522,7 @@
           <a:noFill/>
         </p:spPr>
         <p:txBody>
-          <a:bodyPr wrap="square" anchor="t" lIns="0" rIns="0" tIns="0" bIns="0">
+          <a:bodyPr wrap="square" lIns="0" tIns="0" rIns="0" bIns="0" anchor="t">
             <a:spAutoFit/>
           </a:bodyPr>
           <a:lstStyle/>
@@ -13432,7 +13561,7 @@
           <a:noFill/>
         </p:spPr>
         <p:txBody>
-          <a:bodyPr wrap="square" anchor="t" lIns="0" rIns="0" tIns="0" bIns="0">
+          <a:bodyPr wrap="square" lIns="0" tIns="0" rIns="0" bIns="0" anchor="t">
             <a:spAutoFit/>
           </a:bodyPr>
           <a:lstStyle/>
@@ -13499,6 +13628,7 @@
           <a:lstStyle/>
           <a:p>
             <a:pPr algn="ctr"/>
+            <a:endParaRPr/>
           </a:p>
         </p:txBody>
       </p:sp>
@@ -13519,7 +13649,7 @@
           <a:noFill/>
         </p:spPr>
         <p:txBody>
-          <a:bodyPr wrap="square" anchor="t" lIns="0" rIns="0" tIns="0" bIns="0">
+          <a:bodyPr wrap="square" lIns="0" tIns="0" rIns="0" bIns="0" anchor="t">
             <a:spAutoFit/>
           </a:bodyPr>
           <a:lstStyle/>
@@ -13558,7 +13688,7 @@
           <a:noFill/>
         </p:spPr>
         <p:txBody>
-          <a:bodyPr wrap="square" anchor="t" lIns="0" rIns="0" tIns="0" bIns="0">
+          <a:bodyPr wrap="square" lIns="0" tIns="0" rIns="0" bIns="0" anchor="t">
             <a:spAutoFit/>
           </a:bodyPr>
           <a:lstStyle/>
@@ -13597,7 +13727,7 @@
           <a:noFill/>
         </p:spPr>
         <p:txBody>
-          <a:bodyPr wrap="square" anchor="t" lIns="0" rIns="0" tIns="0" bIns="0">
+          <a:bodyPr wrap="square" lIns="0" tIns="0" rIns="0" bIns="0" anchor="t">
             <a:spAutoFit/>
           </a:bodyPr>
           <a:lstStyle/>
@@ -13664,6 +13794,7 @@
           <a:lstStyle/>
           <a:p>
             <a:pPr algn="ctr"/>
+            <a:endParaRPr/>
           </a:p>
         </p:txBody>
       </p:sp>
@@ -13684,7 +13815,7 @@
           <a:noFill/>
         </p:spPr>
         <p:txBody>
-          <a:bodyPr wrap="square" anchor="t" lIns="0" rIns="0" tIns="0" bIns="0">
+          <a:bodyPr wrap="square" lIns="0" tIns="0" rIns="0" bIns="0" anchor="t">
             <a:spAutoFit/>
           </a:bodyPr>
           <a:lstStyle/>
@@ -13723,7 +13854,7 @@
           <a:noFill/>
         </p:spPr>
         <p:txBody>
-          <a:bodyPr wrap="square" anchor="t" lIns="0" rIns="0" tIns="0" bIns="0">
+          <a:bodyPr wrap="square" lIns="0" tIns="0" rIns="0" bIns="0" anchor="t">
             <a:spAutoFit/>
           </a:bodyPr>
           <a:lstStyle/>
@@ -13762,7 +13893,7 @@
           <a:noFill/>
         </p:spPr>
         <p:txBody>
-          <a:bodyPr wrap="square" anchor="t" lIns="0" rIns="0" tIns="0" bIns="0">
+          <a:bodyPr wrap="square" lIns="0" tIns="0" rIns="0" bIns="0" anchor="t">
             <a:spAutoFit/>
           </a:bodyPr>
           <a:lstStyle/>
@@ -13829,6 +13960,7 @@
           <a:lstStyle/>
           <a:p>
             <a:pPr algn="ctr"/>
+            <a:endParaRPr/>
           </a:p>
         </p:txBody>
       </p:sp>
@@ -13849,7 +13981,7 @@
           <a:noFill/>
         </p:spPr>
         <p:txBody>
-          <a:bodyPr wrap="square" anchor="t" lIns="0" rIns="0" tIns="0" bIns="0">
+          <a:bodyPr wrap="square" lIns="0" tIns="0" rIns="0" bIns="0" anchor="t">
             <a:spAutoFit/>
           </a:bodyPr>
           <a:lstStyle/>
@@ -13888,7 +14020,7 @@
           <a:noFill/>
         </p:spPr>
         <p:txBody>
-          <a:bodyPr wrap="square" anchor="t" lIns="0" rIns="0" tIns="0" bIns="0">
+          <a:bodyPr wrap="square" lIns="0" tIns="0" rIns="0" bIns="0" anchor="t">
             <a:spAutoFit/>
           </a:bodyPr>
           <a:lstStyle/>
@@ -13927,7 +14059,7 @@
           <a:noFill/>
         </p:spPr>
         <p:txBody>
-          <a:bodyPr wrap="square" anchor="t" lIns="0" rIns="0" tIns="0" bIns="0">
+          <a:bodyPr wrap="square" lIns="0" tIns="0" rIns="0" bIns="0" anchor="t">
             <a:spAutoFit/>
           </a:bodyPr>
           <a:lstStyle/>
@@ -13958,7 +14090,7 @@
 </file>
 
 <file path=ppt/slides/slide19.xml><?xml version="1.0" encoding="utf-8"?>
-<p:sld xmlns:a="http://schemas.openxmlformats.org/drawingml/2006/main" xmlns:p="http://schemas.openxmlformats.org/presentationml/2006/main" xmlns:r="http://schemas.openxmlformats.org/officeDocument/2006/relationships">
+<p:sld xmlns:a="http://schemas.openxmlformats.org/drawingml/2006/main" xmlns:r="http://schemas.openxmlformats.org/officeDocument/2006/relationships" xmlns:p="http://schemas.openxmlformats.org/presentationml/2006/main">
   <p:cSld>
     <p:spTree>
       <p:nvGrpSpPr>
@@ -13966,7 +14098,14 @@
         <p:cNvGrpSpPr/>
         <p:nvPr/>
       </p:nvGrpSpPr>
-      <p:grpSpPr/>
+      <p:grpSpPr>
+        <a:xfrm>
+          <a:off x="0" y="0"/>
+          <a:ext cx="0" cy="0"/>
+          <a:chOff x="0" y="0"/>
+          <a:chExt cx="0" cy="0"/>
+        </a:xfrm>
+      </p:grpSpPr>
       <p:sp>
         <p:nvSpPr>
           <p:cNvPr id="2" name="TextBox 1"/>
@@ -13984,7 +14123,7 @@
           <a:noFill/>
         </p:spPr>
         <p:txBody>
-          <a:bodyPr wrap="square" anchor="t" lIns="0" rIns="0" tIns="0" bIns="0">
+          <a:bodyPr wrap="square" lIns="0" tIns="0" rIns="0" bIns="0" anchor="t">
             <a:spAutoFit/>
           </a:bodyPr>
           <a:lstStyle/>
@@ -14023,7 +14162,7 @@
           <a:noFill/>
         </p:spPr>
         <p:txBody>
-          <a:bodyPr wrap="square" anchor="t" lIns="0" rIns="0" tIns="0" bIns="0">
+          <a:bodyPr wrap="square" lIns="0" tIns="0" rIns="0" bIns="0" anchor="t">
             <a:spAutoFit/>
           </a:bodyPr>
           <a:lstStyle/>
@@ -14086,6 +14225,7 @@
           <a:lstStyle/>
           <a:p>
             <a:pPr algn="ctr"/>
+            <a:endParaRPr/>
           </a:p>
         </p:txBody>
       </p:sp>
@@ -14130,6 +14270,7 @@
           <a:lstStyle/>
           <a:p>
             <a:pPr algn="ctr"/>
+            <a:endParaRPr/>
           </a:p>
         </p:txBody>
       </p:sp>
@@ -14150,7 +14291,7 @@
           <a:noFill/>
         </p:spPr>
         <p:txBody>
-          <a:bodyPr wrap="square" anchor="t" lIns="0" rIns="0" tIns="0" bIns="0">
+          <a:bodyPr wrap="square" lIns="0" tIns="0" rIns="0" bIns="0" anchor="t">
             <a:spAutoFit/>
           </a:bodyPr>
           <a:lstStyle/>
@@ -14189,7 +14330,7 @@
           <a:noFill/>
         </p:spPr>
         <p:txBody>
-          <a:bodyPr wrap="square" anchor="t" lIns="0" rIns="0" tIns="0" bIns="0">
+          <a:bodyPr wrap="square" lIns="0" tIns="0" rIns="0" bIns="0" anchor="t">
             <a:spAutoFit/>
           </a:bodyPr>
           <a:lstStyle/>
@@ -14252,7 +14393,7 @@
           </a:fontRef>
         </p:style>
         <p:txBody>
-          <a:bodyPr rtlCol="0" anchor="ctr" wrap="square" lIns="109728" rIns="109728" tIns="54864" bIns="54864"/>
+          <a:bodyPr wrap="square" lIns="109728" tIns="54864" rIns="109728" bIns="54864" rtlCol="0" anchor="ctr"/>
           <a:lstStyle/>
           <a:p>
             <a:pPr algn="ctr">
@@ -14329,7 +14470,7 @@
           </a:fontRef>
         </p:style>
         <p:txBody>
-          <a:bodyPr rtlCol="0" anchor="ctr" wrap="square" lIns="109728" rIns="109728" tIns="54864" bIns="54864"/>
+          <a:bodyPr wrap="square" lIns="109728" tIns="54864" rIns="109728" bIns="54864" rtlCol="0" anchor="ctr"/>
           <a:lstStyle/>
           <a:p>
             <a:pPr algn="ctr">
@@ -14408,6 +14549,7 @@
           <a:lstStyle/>
           <a:p>
             <a:pPr algn="ctr"/>
+            <a:endParaRPr/>
           </a:p>
         </p:txBody>
       </p:sp>
@@ -14428,7 +14570,7 @@
           <a:noFill/>
         </p:spPr>
         <p:txBody>
-          <a:bodyPr wrap="square" anchor="t" lIns="0" rIns="0" tIns="0" bIns="0">
+          <a:bodyPr wrap="square" lIns="0" tIns="0" rIns="0" bIns="0" anchor="t">
             <a:spAutoFit/>
           </a:bodyPr>
           <a:lstStyle/>
@@ -14459,15 +14601,15 @@
         <p:spPr>
           <a:xfrm>
             <a:off x="6492240" y="2697480"/>
-            <a:ext cx="4846320" cy="1005840"/>
-          </a:xfrm>
-          <a:prstGeom prst="rect">
-            <a:avLst/>
-          </a:prstGeom>
-          <a:noFill/>
-        </p:spPr>
-        <p:txBody>
-          <a:bodyPr wrap="square" anchor="t" lIns="0" rIns="0" tIns="0" bIns="0">
+            <a:ext cx="4846320" cy="438774"/>
+          </a:xfrm>
+          <a:prstGeom prst="rect">
+            <a:avLst/>
+          </a:prstGeom>
+          <a:noFill/>
+        </p:spPr>
+        <p:txBody>
+          <a:bodyPr wrap="square" lIns="0" tIns="0" rIns="0" bIns="0" anchor="t">
             <a:spAutoFit/>
           </a:bodyPr>
           <a:lstStyle/>
@@ -14478,13 +14620,76 @@
               </a:lnSpc>
             </a:pPr>
             <a:r>
-              <a:rPr sz="1200" b="0" i="0">
+              <a:rPr sz="1200" b="0" i="0" dirty="0" err="1">
                 <a:solidFill>
                   <a:srgbClr val="232323"/>
                 </a:solidFill>
                 <a:latin typeface="Segoe UI"/>
               </a:rPr>
-              <a:t>Parcours : inscription → exploration d'une salle → validation d'un bloc → publication d'une activité → feed social.</a:t>
+              <a:t>Parcours</a:t>
+            </a:r>
+            <a:r>
+              <a:rPr sz="1200" b="0" i="0" dirty="0">
+                <a:solidFill>
+                  <a:srgbClr val="232323"/>
+                </a:solidFill>
+                <a:latin typeface="Segoe UI"/>
+              </a:rPr>
+              <a:t> : inscription → exploration </a:t>
+            </a:r>
+            <a:r>
+              <a:rPr sz="1200" b="0" i="0" dirty="0" err="1">
+                <a:solidFill>
+                  <a:srgbClr val="232323"/>
+                </a:solidFill>
+                <a:latin typeface="Segoe UI"/>
+              </a:rPr>
+              <a:t>d'une</a:t>
+            </a:r>
+            <a:r>
+              <a:rPr sz="1200" b="0" i="0" dirty="0">
+                <a:solidFill>
+                  <a:srgbClr val="232323"/>
+                </a:solidFill>
+                <a:latin typeface="Segoe UI"/>
+              </a:rPr>
+              <a:t> salle → validation d'un bloc → publication </a:t>
+            </a:r>
+            <a:r>
+              <a:rPr sz="1200" b="0" i="0" dirty="0" err="1">
+                <a:solidFill>
+                  <a:srgbClr val="232323"/>
+                </a:solidFill>
+                <a:latin typeface="Segoe UI"/>
+              </a:rPr>
+              <a:t>d'une</a:t>
+            </a:r>
+            <a:r>
+              <a:rPr sz="1200" b="0" i="0" dirty="0">
+                <a:solidFill>
+                  <a:srgbClr val="232323"/>
+                </a:solidFill>
+                <a:latin typeface="Segoe UI"/>
+              </a:rPr>
+              <a:t> </a:t>
+            </a:r>
+            <a:r>
+              <a:rPr sz="1200" b="0" i="0" dirty="0" err="1">
+                <a:solidFill>
+                  <a:srgbClr val="232323"/>
+                </a:solidFill>
+                <a:latin typeface="Segoe UI"/>
+              </a:rPr>
+              <a:t>activité</a:t>
+            </a:r>
+            <a:r>
+              <a:rPr sz="1200" b="0" i="0" dirty="0">
+                <a:solidFill>
+                  <a:srgbClr val="232323"/>
+                </a:solidFill>
+                <a:latin typeface="Segoe UI"/>
+              </a:rPr>
+              <a:t> → feed social.</a:t>
             </a:r>
           </a:p>
         </p:txBody>
@@ -14530,7 +14735,7 @@
           </a:fontRef>
         </p:style>
         <p:txBody>
-          <a:bodyPr rtlCol="0" anchor="ctr" wrap="square" lIns="109728" rIns="109728" tIns="54864" bIns="54864"/>
+          <a:bodyPr wrap="square" lIns="109728" tIns="54864" rIns="109728" bIns="54864" rtlCol="0" anchor="ctr"/>
           <a:lstStyle/>
           <a:p>
             <a:pPr algn="ctr">
@@ -14539,13 +14744,58 @@
               </a:lnSpc>
             </a:pPr>
             <a:r>
-              <a:rPr sz="1100" b="0">
+              <a:rPr sz="1100" b="0" dirty="0">
                 <a:solidFill>
                   <a:srgbClr val="9A9A93"/>
                 </a:solidFill>
                 <a:latin typeface="Segoe UI"/>
               </a:rPr>
-              <a:t>🖼  QR code / lien démo (optionnel)</a:t>
+              <a:t>🖼  QR code / lien </a:t>
+            </a:r>
+            <a:r>
+              <a:rPr sz="1100" b="0" dirty="0" err="1">
+                <a:solidFill>
+                  <a:srgbClr val="9A9A93"/>
+                </a:solidFill>
+                <a:latin typeface="Segoe UI"/>
+              </a:rPr>
+              <a:t>démo</a:t>
+            </a:r>
+            <a:r>
+              <a:rPr lang="fr-FR" sz="1100" b="0" dirty="0">
+                <a:solidFill>
+                  <a:srgbClr val="9A9A93"/>
+                </a:solidFill>
+                <a:latin typeface="Segoe UI"/>
+              </a:rPr>
+              <a:t> </a:t>
+            </a:r>
+            <a:r>
+              <a:rPr sz="1100" b="0" dirty="0">
+                <a:solidFill>
+                  <a:srgbClr val="9A9A93"/>
+                </a:solidFill>
+                <a:latin typeface="Segoe UI"/>
+              </a:rPr>
+              <a:t>(</a:t>
+            </a:r>
+            <a:r>
+              <a:rPr sz="1100" b="0" dirty="0" err="1">
+                <a:solidFill>
+                  <a:srgbClr val="9A9A93"/>
+                </a:solidFill>
+                <a:latin typeface="Segoe UI"/>
+              </a:rPr>
+              <a:t>optionnel</a:t>
+            </a:r>
+            <a:r>
+              <a:rPr sz="1100" b="0" dirty="0">
+                <a:solidFill>
+                  <a:srgbClr val="9A9A93"/>
+                </a:solidFill>
+                <a:latin typeface="Segoe UI"/>
+              </a:rPr>
+              <a:t>)</a:t>
             </a:r>
           </a:p>
         </p:txBody>
@@ -14559,7 +14809,7 @@
 </file>
 
 <file path=ppt/slides/slide2.xml><?xml version="1.0" encoding="utf-8"?>
-<p:sld xmlns:a="http://schemas.openxmlformats.org/drawingml/2006/main" xmlns:p="http://schemas.openxmlformats.org/presentationml/2006/main" xmlns:r="http://schemas.openxmlformats.org/officeDocument/2006/relationships">
+<p:sld xmlns:a="http://schemas.openxmlformats.org/drawingml/2006/main" xmlns:r="http://schemas.openxmlformats.org/officeDocument/2006/relationships" xmlns:p="http://schemas.openxmlformats.org/presentationml/2006/main">
   <p:cSld>
     <p:spTree>
       <p:nvGrpSpPr>
@@ -14567,7 +14817,14 @@
         <p:cNvGrpSpPr/>
         <p:nvPr/>
       </p:nvGrpSpPr>
-      <p:grpSpPr/>
+      <p:grpSpPr>
+        <a:xfrm>
+          <a:off x="0" y="0"/>
+          <a:ext cx="0" cy="0"/>
+          <a:chOff x="0" y="0"/>
+          <a:chExt cx="0" cy="0"/>
+        </a:xfrm>
+      </p:grpSpPr>
       <p:sp>
         <p:nvSpPr>
           <p:cNvPr id="2" name="TextBox 1"/>
@@ -14585,7 +14842,7 @@
           <a:noFill/>
         </p:spPr>
         <p:txBody>
-          <a:bodyPr wrap="square" anchor="t" lIns="0" rIns="0" tIns="0" bIns="0">
+          <a:bodyPr wrap="square" lIns="0" tIns="0" rIns="0" bIns="0" anchor="t">
             <a:spAutoFit/>
           </a:bodyPr>
           <a:lstStyle/>
@@ -14624,7 +14881,7 @@
           <a:noFill/>
         </p:spPr>
         <p:txBody>
-          <a:bodyPr wrap="square" anchor="t" lIns="0" rIns="0" tIns="0" bIns="0">
+          <a:bodyPr wrap="square" lIns="0" tIns="0" rIns="0" bIns="0" anchor="t">
             <a:spAutoFit/>
           </a:bodyPr>
           <a:lstStyle/>
@@ -14687,6 +14944,7 @@
           <a:lstStyle/>
           <a:p>
             <a:pPr algn="ctr"/>
+            <a:endParaRPr/>
           </a:p>
         </p:txBody>
       </p:sp>
@@ -14731,6 +14989,7 @@
           <a:lstStyle/>
           <a:p>
             <a:pPr algn="ctr"/>
+            <a:endParaRPr/>
           </a:p>
         </p:txBody>
       </p:sp>
@@ -14751,7 +15010,7 @@
           <a:noFill/>
         </p:spPr>
         <p:txBody>
-          <a:bodyPr wrap="square" anchor="t" lIns="0" rIns="0" tIns="0" bIns="0">
+          <a:bodyPr wrap="square" lIns="0" tIns="0" rIns="0" bIns="0" anchor="t">
             <a:spAutoFit/>
           </a:bodyPr>
           <a:lstStyle/>
@@ -14790,7 +15049,7 @@
           <a:noFill/>
         </p:spPr>
         <p:txBody>
-          <a:bodyPr wrap="square" anchor="t" lIns="0" rIns="0" tIns="0" bIns="0">
+          <a:bodyPr wrap="square" lIns="0" tIns="0" rIns="0" bIns="0" anchor="t">
             <a:spAutoFit/>
           </a:bodyPr>
           <a:lstStyle/>
@@ -14853,7 +15112,7 @@
           </a:fontRef>
         </p:style>
         <p:txBody>
-          <a:bodyPr rtlCol="0" anchor="ctr" wrap="square" lIns="109728" rIns="109728" tIns="54864" bIns="54864"/>
+          <a:bodyPr wrap="square" lIns="109728" tIns="54864" rIns="109728" bIns="54864" rtlCol="0" anchor="ctr"/>
           <a:lstStyle/>
           <a:p>
             <a:pPr algn="ctr">
@@ -14906,7 +15165,7 @@
           <a:noFill/>
         </p:spPr>
         <p:txBody>
-          <a:bodyPr wrap="square" anchor="t" lIns="0" rIns="0" tIns="0" bIns="0">
+          <a:bodyPr wrap="square" lIns="0" tIns="0" rIns="0" bIns="0" anchor="t">
             <a:spAutoFit/>
           </a:bodyPr>
           <a:lstStyle/>
@@ -14945,7 +15204,7 @@
           <a:noFill/>
         </p:spPr>
         <p:txBody>
-          <a:bodyPr wrap="square" anchor="t" lIns="0" rIns="0" tIns="0" bIns="0">
+          <a:bodyPr wrap="square" lIns="0" tIns="0" rIns="0" bIns="0" anchor="t">
             <a:spAutoFit/>
           </a:bodyPr>
           <a:lstStyle/>
@@ -14984,7 +15243,7 @@
           <a:noFill/>
         </p:spPr>
         <p:txBody>
-          <a:bodyPr wrap="square" anchor="t" lIns="0" rIns="0" tIns="0" bIns="0">
+          <a:bodyPr wrap="square" lIns="0" tIns="0" rIns="0" bIns="0" anchor="t">
             <a:spAutoFit/>
           </a:bodyPr>
           <a:lstStyle/>
@@ -15023,7 +15282,7 @@
           <a:noFill/>
         </p:spPr>
         <p:txBody>
-          <a:bodyPr wrap="square" anchor="t" lIns="0" rIns="0" tIns="0" bIns="0">
+          <a:bodyPr wrap="square" lIns="0" tIns="0" rIns="0" bIns="0" anchor="t">
             <a:spAutoFit/>
           </a:bodyPr>
           <a:lstStyle/>
@@ -15062,7 +15321,7 @@
           <a:noFill/>
         </p:spPr>
         <p:txBody>
-          <a:bodyPr wrap="square" anchor="t" lIns="0" rIns="0" tIns="0" bIns="0">
+          <a:bodyPr wrap="square" lIns="0" tIns="0" rIns="0" bIns="0" anchor="t">
             <a:spAutoFit/>
           </a:bodyPr>
           <a:lstStyle/>
@@ -15101,7 +15360,7 @@
           <a:noFill/>
         </p:spPr>
         <p:txBody>
-          <a:bodyPr wrap="square" anchor="t" lIns="0" rIns="0" tIns="0" bIns="0">
+          <a:bodyPr wrap="square" lIns="0" tIns="0" rIns="0" bIns="0" anchor="t">
             <a:spAutoFit/>
           </a:bodyPr>
           <a:lstStyle/>
@@ -15140,7 +15399,7 @@
           <a:noFill/>
         </p:spPr>
         <p:txBody>
-          <a:bodyPr wrap="square" anchor="t" lIns="0" rIns="0" tIns="0" bIns="0">
+          <a:bodyPr wrap="square" lIns="0" tIns="0" rIns="0" bIns="0" anchor="t">
             <a:spAutoFit/>
           </a:bodyPr>
           <a:lstStyle/>
@@ -15179,7 +15438,7 @@
           <a:noFill/>
         </p:spPr>
         <p:txBody>
-          <a:bodyPr wrap="square" anchor="t" lIns="0" rIns="0" tIns="0" bIns="0">
+          <a:bodyPr wrap="square" lIns="0" tIns="0" rIns="0" bIns="0" anchor="t">
             <a:spAutoFit/>
           </a:bodyPr>
           <a:lstStyle/>
@@ -15218,7 +15477,7 @@
           <a:noFill/>
         </p:spPr>
         <p:txBody>
-          <a:bodyPr wrap="square" anchor="t" lIns="0" rIns="0" tIns="0" bIns="0">
+          <a:bodyPr wrap="square" lIns="0" tIns="0" rIns="0" bIns="0" anchor="t">
             <a:spAutoFit/>
           </a:bodyPr>
           <a:lstStyle/>
@@ -15257,7 +15516,7 @@
           <a:noFill/>
         </p:spPr>
         <p:txBody>
-          <a:bodyPr wrap="square" anchor="t" lIns="0" rIns="0" tIns="0" bIns="0">
+          <a:bodyPr wrap="square" lIns="0" tIns="0" rIns="0" bIns="0" anchor="t">
             <a:spAutoFit/>
           </a:bodyPr>
           <a:lstStyle/>
@@ -15288,7 +15547,7 @@
 </file>
 
 <file path=ppt/slides/slide20.xml><?xml version="1.0" encoding="utf-8"?>
-<p:sld xmlns:a="http://schemas.openxmlformats.org/drawingml/2006/main" xmlns:p="http://schemas.openxmlformats.org/presentationml/2006/main" xmlns:r="http://schemas.openxmlformats.org/officeDocument/2006/relationships">
+<p:sld xmlns:a="http://schemas.openxmlformats.org/drawingml/2006/main" xmlns:r="http://schemas.openxmlformats.org/officeDocument/2006/relationships" xmlns:p="http://schemas.openxmlformats.org/presentationml/2006/main">
   <p:cSld>
     <p:spTree>
       <p:nvGrpSpPr>
@@ -15296,7 +15555,14 @@
         <p:cNvGrpSpPr/>
         <p:nvPr/>
       </p:nvGrpSpPr>
-      <p:grpSpPr/>
+      <p:grpSpPr>
+        <a:xfrm>
+          <a:off x="0" y="0"/>
+          <a:ext cx="0" cy="0"/>
+          <a:chOff x="0" y="0"/>
+          <a:chExt cx="0" cy="0"/>
+        </a:xfrm>
+      </p:grpSpPr>
       <p:sp>
         <p:nvSpPr>
           <p:cNvPr id="2" name="Rectangle 1"/>
@@ -15338,6 +15604,7 @@
           <a:lstStyle/>
           <a:p>
             <a:pPr algn="ctr"/>
+            <a:endParaRPr/>
           </a:p>
         </p:txBody>
       </p:sp>
@@ -15382,6 +15649,7 @@
           <a:lstStyle/>
           <a:p>
             <a:pPr algn="ctr"/>
+            <a:endParaRPr/>
           </a:p>
         </p:txBody>
       </p:sp>
@@ -15426,6 +15694,7 @@
           <a:lstStyle/>
           <a:p>
             <a:pPr algn="ctr"/>
+            <a:endParaRPr/>
           </a:p>
         </p:txBody>
       </p:sp>
@@ -15446,7 +15715,7 @@
           <a:noFill/>
         </p:spPr>
         <p:txBody>
-          <a:bodyPr wrap="square" anchor="t" lIns="0" rIns="0" tIns="0" bIns="0">
+          <a:bodyPr wrap="square" lIns="0" tIns="0" rIns="0" bIns="0" anchor="t">
             <a:spAutoFit/>
           </a:bodyPr>
           <a:lstStyle/>
@@ -15485,7 +15754,7 @@
           <a:noFill/>
         </p:spPr>
         <p:txBody>
-          <a:bodyPr wrap="square" anchor="t" lIns="0" rIns="0" tIns="0" bIns="0">
+          <a:bodyPr wrap="square" lIns="0" tIns="0" rIns="0" bIns="0" anchor="t">
             <a:spAutoFit/>
           </a:bodyPr>
           <a:lstStyle/>
@@ -15524,7 +15793,7 @@
           <a:noFill/>
         </p:spPr>
         <p:txBody>
-          <a:bodyPr wrap="square" anchor="t" lIns="0" rIns="0" tIns="0" bIns="0">
+          <a:bodyPr wrap="square" lIns="0" tIns="0" rIns="0" bIns="0" anchor="t">
             <a:spAutoFit/>
           </a:bodyPr>
           <a:lstStyle/>
@@ -15563,7 +15832,7 @@
           <a:noFill/>
         </p:spPr>
         <p:txBody>
-          <a:bodyPr wrap="square" anchor="t" lIns="0" rIns="0" tIns="0" bIns="0">
+          <a:bodyPr wrap="square" lIns="0" tIns="0" rIns="0" bIns="0" anchor="t">
             <a:spAutoFit/>
           </a:bodyPr>
           <a:lstStyle/>
@@ -15594,7 +15863,7 @@
 </file>
 
 <file path=ppt/slides/slide3.xml><?xml version="1.0" encoding="utf-8"?>
-<p:sld xmlns:a="http://schemas.openxmlformats.org/drawingml/2006/main" xmlns:p="http://schemas.openxmlformats.org/presentationml/2006/main" xmlns:r="http://schemas.openxmlformats.org/officeDocument/2006/relationships">
+<p:sld xmlns:a="http://schemas.openxmlformats.org/drawingml/2006/main" xmlns:r="http://schemas.openxmlformats.org/officeDocument/2006/relationships" xmlns:p="http://schemas.openxmlformats.org/presentationml/2006/main">
   <p:cSld>
     <p:spTree>
       <p:nvGrpSpPr>
@@ -15602,7 +15871,14 @@
         <p:cNvGrpSpPr/>
         <p:nvPr/>
       </p:nvGrpSpPr>
-      <p:grpSpPr/>
+      <p:grpSpPr>
+        <a:xfrm>
+          <a:off x="0" y="0"/>
+          <a:ext cx="0" cy="0"/>
+          <a:chOff x="0" y="0"/>
+          <a:chExt cx="0" cy="0"/>
+        </a:xfrm>
+      </p:grpSpPr>
       <p:sp>
         <p:nvSpPr>
           <p:cNvPr id="2" name="TextBox 1"/>
@@ -15620,7 +15896,7 @@
           <a:noFill/>
         </p:spPr>
         <p:txBody>
-          <a:bodyPr wrap="square" anchor="t" lIns="0" rIns="0" tIns="0" bIns="0">
+          <a:bodyPr wrap="square" lIns="0" tIns="0" rIns="0" bIns="0" anchor="t">
             <a:spAutoFit/>
           </a:bodyPr>
           <a:lstStyle/>
@@ -15659,7 +15935,7 @@
           <a:noFill/>
         </p:spPr>
         <p:txBody>
-          <a:bodyPr wrap="square" anchor="t" lIns="0" rIns="0" tIns="0" bIns="0">
+          <a:bodyPr wrap="square" lIns="0" tIns="0" rIns="0" bIns="0" anchor="t">
             <a:spAutoFit/>
           </a:bodyPr>
           <a:lstStyle/>
@@ -15722,6 +15998,7 @@
           <a:lstStyle/>
           <a:p>
             <a:pPr algn="ctr"/>
+            <a:endParaRPr/>
           </a:p>
         </p:txBody>
       </p:sp>
@@ -15766,6 +16043,7 @@
           <a:lstStyle/>
           <a:p>
             <a:pPr algn="ctr"/>
+            <a:endParaRPr/>
           </a:p>
         </p:txBody>
       </p:sp>
@@ -15786,7 +16064,7 @@
           <a:noFill/>
         </p:spPr>
         <p:txBody>
-          <a:bodyPr wrap="square" anchor="t" lIns="0" rIns="0" tIns="0" bIns="0">
+          <a:bodyPr wrap="square" lIns="0" tIns="0" rIns="0" bIns="0" anchor="t">
             <a:spAutoFit/>
           </a:bodyPr>
           <a:lstStyle/>
@@ -15825,7 +16103,7 @@
           <a:noFill/>
         </p:spPr>
         <p:txBody>
-          <a:bodyPr wrap="square" anchor="t" lIns="0" rIns="0" tIns="0" bIns="0">
+          <a:bodyPr wrap="square" lIns="0" tIns="0" rIns="0" bIns="0" anchor="t">
             <a:spAutoFit/>
           </a:bodyPr>
           <a:lstStyle/>
@@ -15864,7 +16142,7 @@
           <a:noFill/>
         </p:spPr>
         <p:txBody>
-          <a:bodyPr wrap="square" anchor="t" lIns="0" rIns="0" tIns="0" bIns="0">
+          <a:bodyPr wrap="square" lIns="0" tIns="0" rIns="0" bIns="0" anchor="t">
             <a:spAutoFit/>
           </a:bodyPr>
           <a:lstStyle/>
@@ -15931,6 +16209,7 @@
           <a:lstStyle/>
           <a:p>
             <a:pPr algn="ctr"/>
+            <a:endParaRPr/>
           </a:p>
         </p:txBody>
       </p:sp>
@@ -15951,7 +16230,7 @@
           <a:noFill/>
         </p:spPr>
         <p:txBody>
-          <a:bodyPr wrap="square" anchor="t" lIns="0" rIns="0" tIns="0" bIns="0">
+          <a:bodyPr wrap="square" lIns="0" tIns="0" rIns="0" bIns="0" anchor="t">
             <a:spAutoFit/>
           </a:bodyPr>
           <a:lstStyle/>
@@ -15990,7 +16269,7 @@
           <a:noFill/>
         </p:spPr>
         <p:txBody>
-          <a:bodyPr wrap="square" anchor="t" lIns="0" rIns="0" tIns="0" bIns="0">
+          <a:bodyPr wrap="square" lIns="0" tIns="0" rIns="0" bIns="0" anchor="t">
             <a:spAutoFit/>
           </a:bodyPr>
           <a:lstStyle/>
@@ -16057,6 +16336,7 @@
           <a:lstStyle/>
           <a:p>
             <a:pPr algn="ctr"/>
+            <a:endParaRPr/>
           </a:p>
         </p:txBody>
       </p:sp>
@@ -16077,7 +16357,7 @@
           <a:noFill/>
         </p:spPr>
         <p:txBody>
-          <a:bodyPr wrap="square" anchor="t" lIns="0" rIns="0" tIns="0" bIns="0">
+          <a:bodyPr wrap="square" lIns="0" tIns="0" rIns="0" bIns="0" anchor="t">
             <a:spAutoFit/>
           </a:bodyPr>
           <a:lstStyle/>
@@ -16116,7 +16396,7 @@
           <a:noFill/>
         </p:spPr>
         <p:txBody>
-          <a:bodyPr wrap="square" anchor="t" lIns="0" rIns="0" tIns="0" bIns="0">
+          <a:bodyPr wrap="square" lIns="0" tIns="0" rIns="0" bIns="0" anchor="t">
             <a:spAutoFit/>
           </a:bodyPr>
           <a:lstStyle/>
@@ -16183,6 +16463,7 @@
           <a:lstStyle/>
           <a:p>
             <a:pPr algn="ctr"/>
+            <a:endParaRPr/>
           </a:p>
         </p:txBody>
       </p:sp>
@@ -16203,7 +16484,7 @@
           <a:noFill/>
         </p:spPr>
         <p:txBody>
-          <a:bodyPr wrap="square" anchor="t" lIns="0" rIns="0" tIns="0" bIns="0">
+          <a:bodyPr wrap="square" lIns="0" tIns="0" rIns="0" bIns="0" anchor="t">
             <a:spAutoFit/>
           </a:bodyPr>
           <a:lstStyle/>
@@ -16242,7 +16523,7 @@
           <a:noFill/>
         </p:spPr>
         <p:txBody>
-          <a:bodyPr wrap="square" anchor="t" lIns="0" rIns="0" tIns="0" bIns="0">
+          <a:bodyPr wrap="square" lIns="0" tIns="0" rIns="0" bIns="0" anchor="t">
             <a:spAutoFit/>
           </a:bodyPr>
           <a:lstStyle/>
@@ -16309,6 +16590,7 @@
           <a:lstStyle/>
           <a:p>
             <a:pPr algn="ctr"/>
+            <a:endParaRPr/>
           </a:p>
         </p:txBody>
       </p:sp>
@@ -16329,7 +16611,7 @@
           <a:noFill/>
         </p:spPr>
         <p:txBody>
-          <a:bodyPr wrap="square" anchor="t" lIns="0" rIns="0" tIns="0" bIns="0">
+          <a:bodyPr wrap="square" lIns="0" tIns="0" rIns="0" bIns="0" anchor="t">
             <a:spAutoFit/>
           </a:bodyPr>
           <a:lstStyle/>
@@ -16368,7 +16650,7 @@
           <a:noFill/>
         </p:spPr>
         <p:txBody>
-          <a:bodyPr wrap="square" anchor="t" lIns="0" rIns="0" tIns="0" bIns="0">
+          <a:bodyPr wrap="square" lIns="0" tIns="0" rIns="0" bIns="0" anchor="t">
             <a:spAutoFit/>
           </a:bodyPr>
           <a:lstStyle/>
@@ -16429,7 +16711,7 @@
           </a:fontRef>
         </p:style>
         <p:txBody>
-          <a:bodyPr rtlCol="0" anchor="ctr" wrap="square" lIns="109728" rIns="109728" tIns="54864" bIns="54864"/>
+          <a:bodyPr wrap="square" lIns="109728" tIns="54864" rIns="109728" bIns="54864" rtlCol="0" anchor="ctr"/>
           <a:lstStyle/>
           <a:p>
             <a:pPr algn="ctr">
@@ -16458,7 +16740,7 @@
 </file>
 
 <file path=ppt/slides/slide4.xml><?xml version="1.0" encoding="utf-8"?>
-<p:sld xmlns:a="http://schemas.openxmlformats.org/drawingml/2006/main" xmlns:p="http://schemas.openxmlformats.org/presentationml/2006/main" xmlns:r="http://schemas.openxmlformats.org/officeDocument/2006/relationships">
+<p:sld xmlns:a="http://schemas.openxmlformats.org/drawingml/2006/main" xmlns:r="http://schemas.openxmlformats.org/officeDocument/2006/relationships" xmlns:p="http://schemas.openxmlformats.org/presentationml/2006/main">
   <p:cSld>
     <p:spTree>
       <p:nvGrpSpPr>
@@ -16466,7 +16748,14 @@
         <p:cNvGrpSpPr/>
         <p:nvPr/>
       </p:nvGrpSpPr>
-      <p:grpSpPr/>
+      <p:grpSpPr>
+        <a:xfrm>
+          <a:off x="0" y="0"/>
+          <a:ext cx="0" cy="0"/>
+          <a:chOff x="0" y="0"/>
+          <a:chExt cx="0" cy="0"/>
+        </a:xfrm>
+      </p:grpSpPr>
       <p:sp>
         <p:nvSpPr>
           <p:cNvPr id="2" name="TextBox 1"/>
@@ -16484,7 +16773,7 @@
           <a:noFill/>
         </p:spPr>
         <p:txBody>
-          <a:bodyPr wrap="square" anchor="t" lIns="0" rIns="0" tIns="0" bIns="0">
+          <a:bodyPr wrap="square" lIns="0" tIns="0" rIns="0" bIns="0" anchor="t">
             <a:spAutoFit/>
           </a:bodyPr>
           <a:lstStyle/>
@@ -16523,7 +16812,7 @@
           <a:noFill/>
         </p:spPr>
         <p:txBody>
-          <a:bodyPr wrap="square" anchor="t" lIns="0" rIns="0" tIns="0" bIns="0">
+          <a:bodyPr wrap="square" lIns="0" tIns="0" rIns="0" bIns="0" anchor="t">
             <a:spAutoFit/>
           </a:bodyPr>
           <a:lstStyle/>
@@ -16586,6 +16875,7 @@
           <a:lstStyle/>
           <a:p>
             <a:pPr algn="ctr"/>
+            <a:endParaRPr/>
           </a:p>
         </p:txBody>
       </p:sp>
@@ -16630,6 +16920,7 @@
           <a:lstStyle/>
           <a:p>
             <a:pPr algn="ctr"/>
+            <a:endParaRPr/>
           </a:p>
         </p:txBody>
       </p:sp>
@@ -16650,7 +16941,7 @@
           <a:noFill/>
         </p:spPr>
         <p:txBody>
-          <a:bodyPr wrap="square" anchor="t" lIns="0" rIns="0" tIns="0" bIns="0">
+          <a:bodyPr wrap="square" lIns="0" tIns="0" rIns="0" bIns="0" anchor="t">
             <a:spAutoFit/>
           </a:bodyPr>
           <a:lstStyle/>
@@ -16689,7 +16980,7 @@
           <a:noFill/>
         </p:spPr>
         <p:txBody>
-          <a:bodyPr wrap="square" anchor="t" lIns="0" rIns="0" tIns="0" bIns="0">
+          <a:bodyPr wrap="square" lIns="0" tIns="0" rIns="0" bIns="0" anchor="t">
             <a:spAutoFit/>
           </a:bodyPr>
           <a:lstStyle/>
@@ -16728,7 +17019,7 @@
           <a:noFill/>
         </p:spPr>
         <p:txBody>
-          <a:bodyPr wrap="square" anchor="t" lIns="0" rIns="0" tIns="0" bIns="0">
+          <a:bodyPr wrap="square" lIns="0" tIns="0" rIns="0" bIns="0" anchor="t">
             <a:spAutoFit/>
           </a:bodyPr>
           <a:lstStyle/>
@@ -16793,6 +17084,7 @@
           <a:lstStyle/>
           <a:p>
             <a:pPr algn="ctr"/>
+            <a:endParaRPr/>
           </a:p>
         </p:txBody>
       </p:sp>
@@ -16813,7 +17105,7 @@
           <a:noFill/>
         </p:spPr>
         <p:txBody>
-          <a:bodyPr wrap="square" anchor="t" lIns="0" rIns="0" tIns="0" bIns="0">
+          <a:bodyPr wrap="square" lIns="0" tIns="0" rIns="0" bIns="0" anchor="t">
             <a:spAutoFit/>
           </a:bodyPr>
           <a:lstStyle/>
@@ -16852,7 +17144,7 @@
           <a:noFill/>
         </p:spPr>
         <p:txBody>
-          <a:bodyPr wrap="square" anchor="t" lIns="0" rIns="0" tIns="0" bIns="0">
+          <a:bodyPr wrap="square" lIns="0" tIns="0" rIns="0" bIns="0" anchor="t">
             <a:spAutoFit/>
           </a:bodyPr>
           <a:lstStyle/>
@@ -16915,7 +17207,7 @@
           </a:fontRef>
         </p:style>
         <p:txBody>
-          <a:bodyPr rtlCol="0" anchor="ctr" wrap="square" lIns="109728" rIns="109728" tIns="54864" bIns="54864"/>
+          <a:bodyPr wrap="square" lIns="109728" tIns="54864" rIns="109728" bIns="54864" rtlCol="0" anchor="ctr"/>
           <a:lstStyle/>
           <a:p>
             <a:pPr algn="ctr">
@@ -16960,7 +17252,7 @@
 </file>
 
 <file path=ppt/slides/slide5.xml><?xml version="1.0" encoding="utf-8"?>
-<p:sld xmlns:a="http://schemas.openxmlformats.org/drawingml/2006/main" xmlns:p="http://schemas.openxmlformats.org/presentationml/2006/main" xmlns:r="http://schemas.openxmlformats.org/officeDocument/2006/relationships">
+<p:sld xmlns:a="http://schemas.openxmlformats.org/drawingml/2006/main" xmlns:r="http://schemas.openxmlformats.org/officeDocument/2006/relationships" xmlns:p="http://schemas.openxmlformats.org/presentationml/2006/main">
   <p:cSld>
     <p:spTree>
       <p:nvGrpSpPr>
@@ -16968,7 +17260,14 @@
         <p:cNvGrpSpPr/>
         <p:nvPr/>
       </p:nvGrpSpPr>
-      <p:grpSpPr/>
+      <p:grpSpPr>
+        <a:xfrm>
+          <a:off x="0" y="0"/>
+          <a:ext cx="0" cy="0"/>
+          <a:chOff x="0" y="0"/>
+          <a:chExt cx="0" cy="0"/>
+        </a:xfrm>
+      </p:grpSpPr>
       <p:sp>
         <p:nvSpPr>
           <p:cNvPr id="2" name="TextBox 1"/>
@@ -16986,7 +17285,7 @@
           <a:noFill/>
         </p:spPr>
         <p:txBody>
-          <a:bodyPr wrap="square" anchor="t" lIns="0" rIns="0" tIns="0" bIns="0">
+          <a:bodyPr wrap="square" lIns="0" tIns="0" rIns="0" bIns="0" anchor="t">
             <a:spAutoFit/>
           </a:bodyPr>
           <a:lstStyle/>
@@ -17025,7 +17324,7 @@
           <a:noFill/>
         </p:spPr>
         <p:txBody>
-          <a:bodyPr wrap="square" anchor="t" lIns="0" rIns="0" tIns="0" bIns="0">
+          <a:bodyPr wrap="square" lIns="0" tIns="0" rIns="0" bIns="0" anchor="t">
             <a:spAutoFit/>
           </a:bodyPr>
           <a:lstStyle/>
@@ -17088,6 +17387,7 @@
           <a:lstStyle/>
           <a:p>
             <a:pPr algn="ctr"/>
+            <a:endParaRPr/>
           </a:p>
         </p:txBody>
       </p:sp>
@@ -17132,6 +17432,7 @@
           <a:lstStyle/>
           <a:p>
             <a:pPr algn="ctr"/>
+            <a:endParaRPr/>
           </a:p>
         </p:txBody>
       </p:sp>
@@ -17152,7 +17453,7 @@
           <a:noFill/>
         </p:spPr>
         <p:txBody>
-          <a:bodyPr wrap="square" anchor="t" lIns="0" rIns="0" tIns="0" bIns="0">
+          <a:bodyPr wrap="square" lIns="0" tIns="0" rIns="0" bIns="0" anchor="t">
             <a:spAutoFit/>
           </a:bodyPr>
           <a:lstStyle/>
@@ -17191,7 +17492,7 @@
           <a:noFill/>
         </p:spPr>
         <p:txBody>
-          <a:bodyPr wrap="square" anchor="t" lIns="0" rIns="0" tIns="0" bIns="0">
+          <a:bodyPr wrap="square" lIns="0" tIns="0" rIns="0" bIns="0" anchor="t">
             <a:spAutoFit/>
           </a:bodyPr>
           <a:lstStyle/>
@@ -17256,6 +17557,7 @@
           <a:lstStyle/>
           <a:p>
             <a:pPr algn="ctr"/>
+            <a:endParaRPr/>
           </a:p>
         </p:txBody>
       </p:sp>
@@ -17276,7 +17578,7 @@
           <a:noFill/>
         </p:spPr>
         <p:txBody>
-          <a:bodyPr wrap="square" anchor="t" lIns="0" rIns="0" tIns="0" bIns="0">
+          <a:bodyPr wrap="square" lIns="0" tIns="0" rIns="0" bIns="0" anchor="t">
             <a:spAutoFit/>
           </a:bodyPr>
           <a:lstStyle/>
@@ -17315,7 +17617,7 @@
           <a:noFill/>
         </p:spPr>
         <p:txBody>
-          <a:bodyPr wrap="square" anchor="t" lIns="0" rIns="0" tIns="0" bIns="0">
+          <a:bodyPr wrap="square" lIns="0" tIns="0" rIns="0" bIns="0" anchor="t">
             <a:spAutoFit/>
           </a:bodyPr>
           <a:lstStyle/>
@@ -17382,6 +17684,7 @@
           <a:lstStyle/>
           <a:p>
             <a:pPr algn="ctr"/>
+            <a:endParaRPr/>
           </a:p>
         </p:txBody>
       </p:sp>
@@ -17402,7 +17705,7 @@
           <a:noFill/>
         </p:spPr>
         <p:txBody>
-          <a:bodyPr wrap="square" anchor="t" lIns="0" rIns="0" tIns="0" bIns="0">
+          <a:bodyPr wrap="square" lIns="0" tIns="0" rIns="0" bIns="0" anchor="t">
             <a:spAutoFit/>
           </a:bodyPr>
           <a:lstStyle/>
@@ -17441,7 +17744,7 @@
           <a:noFill/>
         </p:spPr>
         <p:txBody>
-          <a:bodyPr wrap="square" anchor="t" lIns="0" rIns="0" tIns="0" bIns="0">
+          <a:bodyPr wrap="square" lIns="0" tIns="0" rIns="0" bIns="0" anchor="t">
             <a:spAutoFit/>
           </a:bodyPr>
           <a:lstStyle/>
@@ -17504,7 +17807,7 @@
           </a:fontRef>
         </p:style>
         <p:txBody>
-          <a:bodyPr rtlCol="0" anchor="ctr" wrap="square" lIns="109728" rIns="109728" tIns="54864" bIns="54864"/>
+          <a:bodyPr wrap="square" lIns="109728" tIns="54864" rIns="109728" bIns="54864" rtlCol="0" anchor="ctr"/>
           <a:lstStyle/>
           <a:p>
             <a:pPr algn="ctr">
@@ -17581,7 +17884,7 @@
           </a:fontRef>
         </p:style>
         <p:txBody>
-          <a:bodyPr rtlCol="0" anchor="ctr" wrap="square" lIns="109728" rIns="109728" tIns="54864" bIns="54864"/>
+          <a:bodyPr wrap="square" lIns="109728" tIns="54864" rIns="109728" bIns="54864" rtlCol="0" anchor="ctr"/>
           <a:lstStyle/>
           <a:p>
             <a:pPr algn="ctr">
@@ -17626,7 +17929,7 @@
 </file>
 
 <file path=ppt/slides/slide6.xml><?xml version="1.0" encoding="utf-8"?>
-<p:sld xmlns:a="http://schemas.openxmlformats.org/drawingml/2006/main" xmlns:p="http://schemas.openxmlformats.org/presentationml/2006/main" xmlns:r="http://schemas.openxmlformats.org/officeDocument/2006/relationships">
+<p:sld xmlns:a="http://schemas.openxmlformats.org/drawingml/2006/main" xmlns:r="http://schemas.openxmlformats.org/officeDocument/2006/relationships" xmlns:p="http://schemas.openxmlformats.org/presentationml/2006/main">
   <p:cSld>
     <p:spTree>
       <p:nvGrpSpPr>
@@ -17634,7 +17937,14 @@
         <p:cNvGrpSpPr/>
         <p:nvPr/>
       </p:nvGrpSpPr>
-      <p:grpSpPr/>
+      <p:grpSpPr>
+        <a:xfrm>
+          <a:off x="0" y="0"/>
+          <a:ext cx="0" cy="0"/>
+          <a:chOff x="0" y="0"/>
+          <a:chExt cx="0" cy="0"/>
+        </a:xfrm>
+      </p:grpSpPr>
       <p:sp>
         <p:nvSpPr>
           <p:cNvPr id="2" name="TextBox 1"/>
@@ -17652,7 +17962,7 @@
           <a:noFill/>
         </p:spPr>
         <p:txBody>
-          <a:bodyPr wrap="square" anchor="t" lIns="0" rIns="0" tIns="0" bIns="0">
+          <a:bodyPr wrap="square" lIns="0" tIns="0" rIns="0" bIns="0" anchor="t">
             <a:spAutoFit/>
           </a:bodyPr>
           <a:lstStyle/>
@@ -17691,7 +18001,7 @@
           <a:noFill/>
         </p:spPr>
         <p:txBody>
-          <a:bodyPr wrap="square" anchor="t" lIns="0" rIns="0" tIns="0" bIns="0">
+          <a:bodyPr wrap="square" lIns="0" tIns="0" rIns="0" bIns="0" anchor="t">
             <a:spAutoFit/>
           </a:bodyPr>
           <a:lstStyle/>
@@ -17754,6 +18064,7 @@
           <a:lstStyle/>
           <a:p>
             <a:pPr algn="ctr"/>
+            <a:endParaRPr/>
           </a:p>
         </p:txBody>
       </p:sp>
@@ -17798,6 +18109,7 @@
           <a:lstStyle/>
           <a:p>
             <a:pPr algn="ctr"/>
+            <a:endParaRPr/>
           </a:p>
         </p:txBody>
       </p:sp>
@@ -17818,7 +18130,7 @@
           <a:noFill/>
         </p:spPr>
         <p:txBody>
-          <a:bodyPr wrap="square" anchor="t" lIns="0" rIns="0" tIns="0" bIns="0">
+          <a:bodyPr wrap="square" lIns="0" tIns="0" rIns="0" bIns="0" anchor="t">
             <a:spAutoFit/>
           </a:bodyPr>
           <a:lstStyle/>
@@ -17857,7 +18169,7 @@
           <a:noFill/>
         </p:spPr>
         <p:txBody>
-          <a:bodyPr wrap="square" anchor="t" lIns="0" rIns="0" tIns="0" bIns="0">
+          <a:bodyPr wrap="square" lIns="0" tIns="0" rIns="0" bIns="0" anchor="t">
             <a:spAutoFit/>
           </a:bodyPr>
           <a:lstStyle/>
@@ -17896,7 +18208,7 @@
           <a:noFill/>
         </p:spPr>
         <p:txBody>
-          <a:bodyPr wrap="square" anchor="t" lIns="0" rIns="0" tIns="0" bIns="0">
+          <a:bodyPr wrap="square" lIns="0" tIns="0" rIns="0" bIns="0" anchor="t">
             <a:spAutoFit/>
           </a:bodyPr>
           <a:lstStyle/>
@@ -17961,6 +18273,7 @@
           <a:lstStyle/>
           <a:p>
             <a:pPr algn="ctr"/>
+            <a:endParaRPr/>
           </a:p>
         </p:txBody>
       </p:sp>
@@ -17981,7 +18294,7 @@
           <a:noFill/>
         </p:spPr>
         <p:txBody>
-          <a:bodyPr wrap="square" anchor="t" lIns="0" rIns="0" tIns="0" bIns="0">
+          <a:bodyPr wrap="square" lIns="0" tIns="0" rIns="0" bIns="0" anchor="t">
             <a:spAutoFit/>
           </a:bodyPr>
           <a:lstStyle/>
@@ -18020,7 +18333,7 @@
           <a:noFill/>
         </p:spPr>
         <p:txBody>
-          <a:bodyPr wrap="square" anchor="t" lIns="0" rIns="0" tIns="0" bIns="0">
+          <a:bodyPr wrap="square" lIns="0" tIns="0" rIns="0" bIns="0" anchor="t">
             <a:spAutoFit/>
           </a:bodyPr>
           <a:lstStyle/>
@@ -18085,6 +18398,7 @@
           <a:lstStyle/>
           <a:p>
             <a:pPr algn="ctr"/>
+            <a:endParaRPr/>
           </a:p>
         </p:txBody>
       </p:sp>
@@ -18105,7 +18419,7 @@
           <a:noFill/>
         </p:spPr>
         <p:txBody>
-          <a:bodyPr wrap="square" anchor="t" lIns="0" rIns="0" tIns="0" bIns="0">
+          <a:bodyPr wrap="square" lIns="0" tIns="0" rIns="0" bIns="0" anchor="t">
             <a:spAutoFit/>
           </a:bodyPr>
           <a:lstStyle/>
@@ -18144,7 +18458,7 @@
           <a:noFill/>
         </p:spPr>
         <p:txBody>
-          <a:bodyPr wrap="square" anchor="t" lIns="0" rIns="0" tIns="0" bIns="0">
+          <a:bodyPr wrap="square" lIns="0" tIns="0" rIns="0" bIns="0" anchor="t">
             <a:spAutoFit/>
           </a:bodyPr>
           <a:lstStyle/>
@@ -18209,6 +18523,7 @@
           <a:lstStyle/>
           <a:p>
             <a:pPr algn="ctr"/>
+            <a:endParaRPr/>
           </a:p>
         </p:txBody>
       </p:sp>
@@ -18229,7 +18544,7 @@
           <a:noFill/>
         </p:spPr>
         <p:txBody>
-          <a:bodyPr wrap="square" anchor="t" lIns="0" rIns="0" tIns="0" bIns="0">
+          <a:bodyPr wrap="square" lIns="0" tIns="0" rIns="0" bIns="0" anchor="t">
             <a:spAutoFit/>
           </a:bodyPr>
           <a:lstStyle/>
@@ -18268,7 +18583,7 @@
           <a:noFill/>
         </p:spPr>
         <p:txBody>
-          <a:bodyPr wrap="square" anchor="t" lIns="0" rIns="0" tIns="0" bIns="0">
+          <a:bodyPr wrap="square" lIns="0" tIns="0" rIns="0" bIns="0" anchor="t">
             <a:spAutoFit/>
           </a:bodyPr>
           <a:lstStyle/>
@@ -18333,6 +18648,7 @@
           <a:lstStyle/>
           <a:p>
             <a:pPr algn="ctr"/>
+            <a:endParaRPr/>
           </a:p>
         </p:txBody>
       </p:sp>
@@ -18353,7 +18669,7 @@
           <a:noFill/>
         </p:spPr>
         <p:txBody>
-          <a:bodyPr wrap="square" anchor="t" lIns="0" rIns="0" tIns="0" bIns="0">
+          <a:bodyPr wrap="square" lIns="0" tIns="0" rIns="0" bIns="0" anchor="t">
             <a:spAutoFit/>
           </a:bodyPr>
           <a:lstStyle/>
@@ -18392,7 +18708,7 @@
           <a:noFill/>
         </p:spPr>
         <p:txBody>
-          <a:bodyPr wrap="square" anchor="t" lIns="0" rIns="0" tIns="0" bIns="0">
+          <a:bodyPr wrap="square" lIns="0" tIns="0" rIns="0" bIns="0" anchor="t">
             <a:spAutoFit/>
           </a:bodyPr>
           <a:lstStyle/>
@@ -18457,6 +18773,7 @@
           <a:lstStyle/>
           <a:p>
             <a:pPr algn="ctr"/>
+            <a:endParaRPr/>
           </a:p>
         </p:txBody>
       </p:sp>
@@ -18477,7 +18794,7 @@
           <a:noFill/>
         </p:spPr>
         <p:txBody>
-          <a:bodyPr wrap="square" anchor="t" lIns="0" rIns="0" tIns="0" bIns="0">
+          <a:bodyPr wrap="square" lIns="0" tIns="0" rIns="0" bIns="0" anchor="t">
             <a:spAutoFit/>
           </a:bodyPr>
           <a:lstStyle/>
@@ -18516,7 +18833,7 @@
           <a:noFill/>
         </p:spPr>
         <p:txBody>
-          <a:bodyPr wrap="square" anchor="t" lIns="0" rIns="0" tIns="0" bIns="0">
+          <a:bodyPr wrap="square" lIns="0" tIns="0" rIns="0" bIns="0" anchor="t">
             <a:spAutoFit/>
           </a:bodyPr>
           <a:lstStyle/>
@@ -18581,6 +18898,7 @@
           <a:lstStyle/>
           <a:p>
             <a:pPr algn="ctr"/>
+            <a:endParaRPr/>
           </a:p>
         </p:txBody>
       </p:sp>
@@ -18601,7 +18919,7 @@
           <a:noFill/>
         </p:spPr>
         <p:txBody>
-          <a:bodyPr wrap="square" anchor="t" lIns="0" rIns="0" tIns="0" bIns="0">
+          <a:bodyPr wrap="square" lIns="0" tIns="0" rIns="0" bIns="0" anchor="t">
             <a:spAutoFit/>
           </a:bodyPr>
           <a:lstStyle/>
@@ -18640,7 +18958,7 @@
           <a:noFill/>
         </p:spPr>
         <p:txBody>
-          <a:bodyPr wrap="square" anchor="t" lIns="0" rIns="0" tIns="0" bIns="0">
+          <a:bodyPr wrap="square" lIns="0" tIns="0" rIns="0" bIns="0" anchor="t">
             <a:spAutoFit/>
           </a:bodyPr>
           <a:lstStyle/>
@@ -18671,7 +18989,7 @@
 </file>
 
 <file path=ppt/slides/slide7.xml><?xml version="1.0" encoding="utf-8"?>
-<p:sld xmlns:a="http://schemas.openxmlformats.org/drawingml/2006/main" xmlns:p="http://schemas.openxmlformats.org/presentationml/2006/main" xmlns:r="http://schemas.openxmlformats.org/officeDocument/2006/relationships">
+<p:sld xmlns:a="http://schemas.openxmlformats.org/drawingml/2006/main" xmlns:r="http://schemas.openxmlformats.org/officeDocument/2006/relationships" xmlns:p="http://schemas.openxmlformats.org/presentationml/2006/main">
   <p:cSld>
     <p:spTree>
       <p:nvGrpSpPr>
@@ -18679,7 +18997,14 @@
         <p:cNvGrpSpPr/>
         <p:nvPr/>
       </p:nvGrpSpPr>
-      <p:grpSpPr/>
+      <p:grpSpPr>
+        <a:xfrm>
+          <a:off x="0" y="0"/>
+          <a:ext cx="0" cy="0"/>
+          <a:chOff x="0" y="0"/>
+          <a:chExt cx="0" cy="0"/>
+        </a:xfrm>
+      </p:grpSpPr>
       <p:sp>
         <p:nvSpPr>
           <p:cNvPr id="2" name="TextBox 1"/>
@@ -18697,7 +19022,7 @@
           <a:noFill/>
         </p:spPr>
         <p:txBody>
-          <a:bodyPr wrap="square" anchor="t" lIns="0" rIns="0" tIns="0" bIns="0">
+          <a:bodyPr wrap="square" lIns="0" tIns="0" rIns="0" bIns="0" anchor="t">
             <a:spAutoFit/>
           </a:bodyPr>
           <a:lstStyle/>
@@ -18736,7 +19061,7 @@
           <a:noFill/>
         </p:spPr>
         <p:txBody>
-          <a:bodyPr wrap="square" anchor="t" lIns="0" rIns="0" tIns="0" bIns="0">
+          <a:bodyPr wrap="square" lIns="0" tIns="0" rIns="0" bIns="0" anchor="t">
             <a:spAutoFit/>
           </a:bodyPr>
           <a:lstStyle/>
@@ -18799,6 +19124,7 @@
           <a:lstStyle/>
           <a:p>
             <a:pPr algn="ctr"/>
+            <a:endParaRPr/>
           </a:p>
         </p:txBody>
       </p:sp>
@@ -18843,6 +19169,7 @@
           <a:lstStyle/>
           <a:p>
             <a:pPr algn="ctr"/>
+            <a:endParaRPr/>
           </a:p>
         </p:txBody>
       </p:sp>
@@ -18863,7 +19190,7 @@
           <a:noFill/>
         </p:spPr>
         <p:txBody>
-          <a:bodyPr wrap="square" anchor="t" lIns="0" rIns="0" tIns="0" bIns="0">
+          <a:bodyPr wrap="square" lIns="0" tIns="0" rIns="0" bIns="0" anchor="t">
             <a:spAutoFit/>
           </a:bodyPr>
           <a:lstStyle/>
@@ -18902,7 +19229,7 @@
           <a:noFill/>
         </p:spPr>
         <p:txBody>
-          <a:bodyPr wrap="square" anchor="t" lIns="0" rIns="0" tIns="0" bIns="0">
+          <a:bodyPr wrap="square" lIns="0" tIns="0" rIns="0" bIns="0" anchor="t">
             <a:spAutoFit/>
           </a:bodyPr>
           <a:lstStyle/>
@@ -18941,7 +19268,7 @@
           <a:noFill/>
         </p:spPr>
         <p:txBody>
-          <a:bodyPr wrap="square" anchor="t" lIns="0" rIns="0" tIns="0" bIns="0">
+          <a:bodyPr wrap="square" lIns="0" tIns="0" rIns="0" bIns="0" anchor="t">
             <a:spAutoFit/>
           </a:bodyPr>
           <a:lstStyle/>
@@ -19004,6 +19331,7 @@
           <a:lstStyle/>
           <a:p>
             <a:pPr algn="ctr"/>
+            <a:endParaRPr/>
           </a:p>
         </p:txBody>
       </p:sp>
@@ -19048,6 +19376,7 @@
           <a:lstStyle/>
           <a:p>
             <a:pPr algn="ctr"/>
+            <a:endParaRPr/>
           </a:p>
         </p:txBody>
       </p:sp>
@@ -19092,6 +19421,7 @@
           <a:lstStyle/>
           <a:p>
             <a:pPr algn="ctr"/>
+            <a:endParaRPr/>
           </a:p>
         </p:txBody>
       </p:sp>
@@ -19112,7 +19442,7 @@
           <a:noFill/>
         </p:spPr>
         <p:txBody>
-          <a:bodyPr wrap="square" anchor="t" lIns="0" rIns="0" tIns="0" bIns="0">
+          <a:bodyPr wrap="square" lIns="0" tIns="0" rIns="0" bIns="0" anchor="t">
             <a:spAutoFit/>
           </a:bodyPr>
           <a:lstStyle/>
@@ -19151,7 +19481,7 @@
           <a:noFill/>
         </p:spPr>
         <p:txBody>
-          <a:bodyPr wrap="square" anchor="t" lIns="0" rIns="0" tIns="0" bIns="0">
+          <a:bodyPr wrap="square" lIns="0" tIns="0" rIns="0" bIns="0" anchor="t">
             <a:spAutoFit/>
           </a:bodyPr>
           <a:lstStyle/>
@@ -19190,7 +19520,7 @@
           <a:noFill/>
         </p:spPr>
         <p:txBody>
-          <a:bodyPr wrap="square" anchor="t" lIns="0" rIns="0" tIns="0" bIns="0">
+          <a:bodyPr wrap="square" lIns="0" tIns="0" rIns="0" bIns="0" anchor="t">
             <a:spAutoFit/>
           </a:bodyPr>
           <a:lstStyle/>
@@ -19229,7 +19559,7 @@
           <a:noFill/>
         </p:spPr>
         <p:txBody>
-          <a:bodyPr wrap="square" anchor="t" lIns="0" rIns="0" tIns="0" bIns="0">
+          <a:bodyPr wrap="square" lIns="0" tIns="0" rIns="0" bIns="0" anchor="t">
             <a:spAutoFit/>
           </a:bodyPr>
           <a:lstStyle/>
@@ -19268,7 +19598,7 @@
           <a:noFill/>
         </p:spPr>
         <p:txBody>
-          <a:bodyPr wrap="square" anchor="t" lIns="0" rIns="0" tIns="0" bIns="0">
+          <a:bodyPr wrap="square" lIns="0" tIns="0" rIns="0" bIns="0" anchor="t">
             <a:spAutoFit/>
           </a:bodyPr>
           <a:lstStyle/>
@@ -19307,7 +19637,7 @@
           <a:noFill/>
         </p:spPr>
         <p:txBody>
-          <a:bodyPr wrap="square" anchor="t" lIns="0" rIns="0" tIns="0" bIns="0">
+          <a:bodyPr wrap="square" lIns="0" tIns="0" rIns="0" bIns="0" anchor="t">
             <a:spAutoFit/>
           </a:bodyPr>
           <a:lstStyle/>
@@ -19346,7 +19676,7 @@
           <a:noFill/>
         </p:spPr>
         <p:txBody>
-          <a:bodyPr wrap="square" anchor="t" lIns="0" rIns="0" tIns="0" bIns="0">
+          <a:bodyPr wrap="square" lIns="0" tIns="0" rIns="0" bIns="0" anchor="t">
             <a:spAutoFit/>
           </a:bodyPr>
           <a:lstStyle/>
@@ -19385,7 +19715,7 @@
           <a:noFill/>
         </p:spPr>
         <p:txBody>
-          <a:bodyPr wrap="square" anchor="t" lIns="0" rIns="0" tIns="0" bIns="0">
+          <a:bodyPr wrap="square" lIns="0" tIns="0" rIns="0" bIns="0" anchor="t">
             <a:spAutoFit/>
           </a:bodyPr>
           <a:lstStyle/>
@@ -19424,7 +19754,7 @@
           <a:noFill/>
         </p:spPr>
         <p:txBody>
-          <a:bodyPr wrap="square" anchor="t" lIns="0" rIns="0" tIns="0" bIns="0">
+          <a:bodyPr wrap="square" lIns="0" tIns="0" rIns="0" bIns="0" anchor="t">
             <a:spAutoFit/>
           </a:bodyPr>
           <a:lstStyle/>
@@ -19455,7 +19785,7 @@
 </file>
 
 <file path=ppt/slides/slide8.xml><?xml version="1.0" encoding="utf-8"?>
-<p:sld xmlns:a="http://schemas.openxmlformats.org/drawingml/2006/main" xmlns:p="http://schemas.openxmlformats.org/presentationml/2006/main" xmlns:r="http://schemas.openxmlformats.org/officeDocument/2006/relationships">
+<p:sld xmlns:a="http://schemas.openxmlformats.org/drawingml/2006/main" xmlns:r="http://schemas.openxmlformats.org/officeDocument/2006/relationships" xmlns:p="http://schemas.openxmlformats.org/presentationml/2006/main">
   <p:cSld>
     <p:spTree>
       <p:nvGrpSpPr>
@@ -19463,7 +19793,14 @@
         <p:cNvGrpSpPr/>
         <p:nvPr/>
       </p:nvGrpSpPr>
-      <p:grpSpPr/>
+      <p:grpSpPr>
+        <a:xfrm>
+          <a:off x="0" y="0"/>
+          <a:ext cx="0" cy="0"/>
+          <a:chOff x="0" y="0"/>
+          <a:chExt cx="0" cy="0"/>
+        </a:xfrm>
+      </p:grpSpPr>
       <p:sp>
         <p:nvSpPr>
           <p:cNvPr id="2" name="TextBox 1"/>
@@ -19481,7 +19818,7 @@
           <a:noFill/>
         </p:spPr>
         <p:txBody>
-          <a:bodyPr wrap="square" anchor="t" lIns="0" rIns="0" tIns="0" bIns="0">
+          <a:bodyPr wrap="square" lIns="0" tIns="0" rIns="0" bIns="0" anchor="t">
             <a:spAutoFit/>
           </a:bodyPr>
           <a:lstStyle/>
@@ -19520,7 +19857,7 @@
           <a:noFill/>
         </p:spPr>
         <p:txBody>
-          <a:bodyPr wrap="square" anchor="t" lIns="0" rIns="0" tIns="0" bIns="0">
+          <a:bodyPr wrap="square" lIns="0" tIns="0" rIns="0" bIns="0" anchor="t">
             <a:spAutoFit/>
           </a:bodyPr>
           <a:lstStyle/>
@@ -19583,6 +19920,7 @@
           <a:lstStyle/>
           <a:p>
             <a:pPr algn="ctr"/>
+            <a:endParaRPr/>
           </a:p>
         </p:txBody>
       </p:sp>
@@ -19627,6 +19965,7 @@
           <a:lstStyle/>
           <a:p>
             <a:pPr algn="ctr"/>
+            <a:endParaRPr/>
           </a:p>
         </p:txBody>
       </p:sp>
@@ -19647,7 +19986,7 @@
           <a:noFill/>
         </p:spPr>
         <p:txBody>
-          <a:bodyPr wrap="square" anchor="t" lIns="0" rIns="0" tIns="0" bIns="0">
+          <a:bodyPr wrap="square" lIns="0" tIns="0" rIns="0" bIns="0" anchor="t">
             <a:spAutoFit/>
           </a:bodyPr>
           <a:lstStyle/>
@@ -19686,7 +20025,7 @@
           <a:noFill/>
         </p:spPr>
         <p:txBody>
-          <a:bodyPr wrap="square" anchor="t" lIns="0" rIns="0" tIns="0" bIns="0">
+          <a:bodyPr wrap="square" lIns="0" tIns="0" rIns="0" bIns="0" anchor="t">
             <a:spAutoFit/>
           </a:bodyPr>
           <a:lstStyle/>
@@ -19725,7 +20064,7 @@
           <a:noFill/>
         </p:spPr>
         <p:txBody>
-          <a:bodyPr wrap="square" anchor="t" lIns="0" rIns="0" tIns="0" bIns="0">
+          <a:bodyPr wrap="square" lIns="0" tIns="0" rIns="0" bIns="0" anchor="t">
             <a:spAutoFit/>
           </a:bodyPr>
           <a:lstStyle/>
@@ -19786,7 +20125,7 @@
           </a:fontRef>
         </p:style>
         <p:txBody>
-          <a:bodyPr rtlCol="0" anchor="ctr" wrap="square" lIns="109728" rIns="109728" tIns="54864" bIns="54864"/>
+          <a:bodyPr wrap="square" lIns="109728" tIns="54864" rIns="109728" bIns="54864" rtlCol="0" anchor="ctr"/>
           <a:lstStyle/>
           <a:p>
             <a:pPr algn="ctr">
@@ -19851,6 +20190,7 @@
           <a:lstStyle/>
           <a:p>
             <a:pPr algn="ctr"/>
+            <a:endParaRPr/>
           </a:p>
         </p:txBody>
       </p:sp>
@@ -19871,7 +20211,7 @@
           <a:noFill/>
         </p:spPr>
         <p:txBody>
-          <a:bodyPr wrap="square" anchor="t" lIns="0" rIns="0" tIns="0" bIns="0">
+          <a:bodyPr wrap="square" lIns="0" tIns="0" rIns="0" bIns="0" anchor="t">
             <a:spAutoFit/>
           </a:bodyPr>
           <a:lstStyle/>
@@ -19910,7 +20250,7 @@
           <a:noFill/>
         </p:spPr>
         <p:txBody>
-          <a:bodyPr wrap="square" anchor="t" lIns="0" rIns="0" tIns="0" bIns="0">
+          <a:bodyPr wrap="square" lIns="0" tIns="0" rIns="0" bIns="0" anchor="t">
             <a:spAutoFit/>
           </a:bodyPr>
           <a:lstStyle/>
@@ -19971,7 +20311,7 @@
           </a:fontRef>
         </p:style>
         <p:txBody>
-          <a:bodyPr rtlCol="0" anchor="ctr" wrap="square" lIns="109728" rIns="109728" tIns="54864" bIns="54864"/>
+          <a:bodyPr wrap="square" lIns="109728" tIns="54864" rIns="109728" bIns="54864" rtlCol="0" anchor="ctr"/>
           <a:lstStyle/>
           <a:p>
             <a:pPr algn="ctr">
@@ -20036,6 +20376,7 @@
           <a:lstStyle/>
           <a:p>
             <a:pPr algn="ctr"/>
+            <a:endParaRPr/>
           </a:p>
         </p:txBody>
       </p:sp>
@@ -20056,7 +20397,7 @@
           <a:noFill/>
         </p:spPr>
         <p:txBody>
-          <a:bodyPr wrap="square" anchor="t" lIns="0" rIns="0" tIns="0" bIns="0">
+          <a:bodyPr wrap="square" lIns="0" tIns="0" rIns="0" bIns="0" anchor="t">
             <a:spAutoFit/>
           </a:bodyPr>
           <a:lstStyle/>
@@ -20095,7 +20436,7 @@
           <a:noFill/>
         </p:spPr>
         <p:txBody>
-          <a:bodyPr wrap="square" anchor="t" lIns="0" rIns="0" tIns="0" bIns="0">
+          <a:bodyPr wrap="square" lIns="0" tIns="0" rIns="0" bIns="0" anchor="t">
             <a:spAutoFit/>
           </a:bodyPr>
           <a:lstStyle/>
@@ -20156,7 +20497,7 @@
           </a:fontRef>
         </p:style>
         <p:txBody>
-          <a:bodyPr rtlCol="0" anchor="ctr" wrap="square" lIns="109728" rIns="109728" tIns="54864" bIns="54864"/>
+          <a:bodyPr wrap="square" lIns="109728" tIns="54864" rIns="109728" bIns="54864" rtlCol="0" anchor="ctr"/>
           <a:lstStyle/>
           <a:p>
             <a:pPr algn="ctr">
@@ -20221,6 +20562,7 @@
           <a:lstStyle/>
           <a:p>
             <a:pPr algn="ctr"/>
+            <a:endParaRPr/>
           </a:p>
         </p:txBody>
       </p:sp>
@@ -20241,7 +20583,7 @@
           <a:noFill/>
         </p:spPr>
         <p:txBody>
-          <a:bodyPr wrap="square" anchor="t" lIns="0" rIns="0" tIns="0" bIns="0">
+          <a:bodyPr wrap="square" lIns="0" tIns="0" rIns="0" bIns="0" anchor="t">
             <a:spAutoFit/>
           </a:bodyPr>
           <a:lstStyle/>
@@ -20280,7 +20622,7 @@
           <a:noFill/>
         </p:spPr>
         <p:txBody>
-          <a:bodyPr wrap="square" anchor="t" lIns="0" rIns="0" tIns="0" bIns="0">
+          <a:bodyPr wrap="square" lIns="0" tIns="0" rIns="0" bIns="0" anchor="t">
             <a:spAutoFit/>
           </a:bodyPr>
           <a:lstStyle/>
@@ -20341,7 +20683,7 @@
           </a:fontRef>
         </p:style>
         <p:txBody>
-          <a:bodyPr rtlCol="0" anchor="ctr" wrap="square" lIns="109728" rIns="109728" tIns="54864" bIns="54864"/>
+          <a:bodyPr wrap="square" lIns="109728" tIns="54864" rIns="109728" bIns="54864" rtlCol="0" anchor="ctr"/>
           <a:lstStyle/>
           <a:p>
             <a:pPr algn="ctr">
@@ -20406,6 +20748,7 @@
           <a:lstStyle/>
           <a:p>
             <a:pPr algn="ctr"/>
+            <a:endParaRPr/>
           </a:p>
         </p:txBody>
       </p:sp>
@@ -20426,7 +20769,7 @@
           <a:noFill/>
         </p:spPr>
         <p:txBody>
-          <a:bodyPr wrap="square" anchor="t" lIns="0" rIns="0" tIns="0" bIns="0">
+          <a:bodyPr wrap="square" lIns="0" tIns="0" rIns="0" bIns="0" anchor="t">
             <a:spAutoFit/>
           </a:bodyPr>
           <a:lstStyle/>
@@ -20465,7 +20808,7 @@
           <a:noFill/>
         </p:spPr>
         <p:txBody>
-          <a:bodyPr wrap="square" anchor="t" lIns="0" rIns="0" tIns="0" bIns="0">
+          <a:bodyPr wrap="square" lIns="0" tIns="0" rIns="0" bIns="0" anchor="t">
             <a:spAutoFit/>
           </a:bodyPr>
           <a:lstStyle/>
@@ -20526,7 +20869,7 @@
           </a:fontRef>
         </p:style>
         <p:txBody>
-          <a:bodyPr rtlCol="0" anchor="ctr" wrap="square" lIns="109728" rIns="109728" tIns="54864" bIns="54864"/>
+          <a:bodyPr wrap="square" lIns="109728" tIns="54864" rIns="109728" bIns="54864" rtlCol="0" anchor="ctr"/>
           <a:lstStyle/>
           <a:p>
             <a:pPr algn="ctr">
@@ -20555,7 +20898,7 @@
 </file>
 
 <file path=ppt/slides/slide9.xml><?xml version="1.0" encoding="utf-8"?>
-<p:sld xmlns:a="http://schemas.openxmlformats.org/drawingml/2006/main" xmlns:p="http://schemas.openxmlformats.org/presentationml/2006/main" xmlns:r="http://schemas.openxmlformats.org/officeDocument/2006/relationships">
+<p:sld xmlns:a="http://schemas.openxmlformats.org/drawingml/2006/main" xmlns:r="http://schemas.openxmlformats.org/officeDocument/2006/relationships" xmlns:p="http://schemas.openxmlformats.org/presentationml/2006/main">
   <p:cSld>
     <p:spTree>
       <p:nvGrpSpPr>
@@ -20563,7 +20906,14 @@
         <p:cNvGrpSpPr/>
         <p:nvPr/>
       </p:nvGrpSpPr>
-      <p:grpSpPr/>
+      <p:grpSpPr>
+        <a:xfrm>
+          <a:off x="0" y="0"/>
+          <a:ext cx="0" cy="0"/>
+          <a:chOff x="0" y="0"/>
+          <a:chExt cx="0" cy="0"/>
+        </a:xfrm>
+      </p:grpSpPr>
       <p:sp>
         <p:nvSpPr>
           <p:cNvPr id="2" name="TextBox 1"/>
@@ -20581,7 +20931,7 @@
           <a:noFill/>
         </p:spPr>
         <p:txBody>
-          <a:bodyPr wrap="square" anchor="t" lIns="0" rIns="0" tIns="0" bIns="0">
+          <a:bodyPr wrap="square" lIns="0" tIns="0" rIns="0" bIns="0" anchor="t">
             <a:spAutoFit/>
           </a:bodyPr>
           <a:lstStyle/>
@@ -20620,7 +20970,7 @@
           <a:noFill/>
         </p:spPr>
         <p:txBody>
-          <a:bodyPr wrap="square" anchor="t" lIns="0" rIns="0" tIns="0" bIns="0">
+          <a:bodyPr wrap="square" lIns="0" tIns="0" rIns="0" bIns="0" anchor="t">
             <a:spAutoFit/>
           </a:bodyPr>
           <a:lstStyle/>
@@ -20683,6 +21033,7 @@
           <a:lstStyle/>
           <a:p>
             <a:pPr algn="ctr"/>
+            <a:endParaRPr/>
           </a:p>
         </p:txBody>
       </p:sp>
@@ -20727,6 +21078,7 @@
           <a:lstStyle/>
           <a:p>
             <a:pPr algn="ctr"/>
+            <a:endParaRPr/>
           </a:p>
         </p:txBody>
       </p:sp>
@@ -20747,7 +21099,7 @@
           <a:noFill/>
         </p:spPr>
         <p:txBody>
-          <a:bodyPr wrap="square" anchor="t" lIns="0" rIns="0" tIns="0" bIns="0">
+          <a:bodyPr wrap="square" lIns="0" tIns="0" rIns="0" bIns="0" anchor="t">
             <a:spAutoFit/>
           </a:bodyPr>
           <a:lstStyle/>
@@ -20786,7 +21138,7 @@
           <a:noFill/>
         </p:spPr>
         <p:txBody>
-          <a:bodyPr wrap="square" anchor="t" lIns="0" rIns="0" tIns="0" bIns="0">
+          <a:bodyPr wrap="square" lIns="0" tIns="0" rIns="0" bIns="0" anchor="t">
             <a:spAutoFit/>
           </a:bodyPr>
           <a:lstStyle/>
@@ -20825,7 +21177,7 @@
           <a:noFill/>
         </p:spPr>
         <p:txBody>
-          <a:bodyPr wrap="square" anchor="t" lIns="0" rIns="0" tIns="0" bIns="0">
+          <a:bodyPr wrap="square" lIns="0" tIns="0" rIns="0" bIns="0" anchor="t">
             <a:spAutoFit/>
           </a:bodyPr>
           <a:lstStyle/>
@@ -20892,6 +21244,7 @@
           <a:lstStyle/>
           <a:p>
             <a:pPr algn="ctr"/>
+            <a:endParaRPr/>
           </a:p>
         </p:txBody>
       </p:sp>
@@ -20912,7 +21265,7 @@
           <a:noFill/>
         </p:spPr>
         <p:txBody>
-          <a:bodyPr wrap="square" anchor="t" lIns="0" rIns="0" tIns="0" bIns="0">
+          <a:bodyPr wrap="square" lIns="0" tIns="0" rIns="0" bIns="0" anchor="t">
             <a:spAutoFit/>
           </a:bodyPr>
           <a:lstStyle/>
@@ -20951,7 +21304,7 @@
           <a:noFill/>
         </p:spPr>
         <p:txBody>
-          <a:bodyPr wrap="square" anchor="t" lIns="0" rIns="0" tIns="0" bIns="0">
+          <a:bodyPr wrap="square" lIns="0" tIns="0" rIns="0" bIns="0" anchor="t">
             <a:spAutoFit/>
           </a:bodyPr>
           <a:lstStyle/>
@@ -20990,7 +21343,7 @@
           <a:noFill/>
         </p:spPr>
         <p:txBody>
-          <a:bodyPr wrap="square" anchor="t" lIns="0" rIns="0" tIns="0" bIns="0">
+          <a:bodyPr wrap="square" lIns="0" tIns="0" rIns="0" bIns="0" anchor="t">
             <a:spAutoFit/>
           </a:bodyPr>
           <a:lstStyle/>
@@ -21029,7 +21382,7 @@
           <a:noFill/>
         </p:spPr>
         <p:txBody>
-          <a:bodyPr wrap="square" anchor="t" lIns="0" rIns="0" tIns="0" bIns="0">
+          <a:bodyPr wrap="square" lIns="0" tIns="0" rIns="0" bIns="0" anchor="t">
             <a:spAutoFit/>
           </a:bodyPr>
           <a:lstStyle/>
@@ -21096,6 +21449,7 @@
           <a:lstStyle/>
           <a:p>
             <a:pPr algn="ctr"/>
+            <a:endParaRPr/>
           </a:p>
         </p:txBody>
       </p:sp>
@@ -21116,7 +21470,7 @@
           <a:noFill/>
         </p:spPr>
         <p:txBody>
-          <a:bodyPr wrap="square" anchor="t" lIns="0" rIns="0" tIns="0" bIns="0">
+          <a:bodyPr wrap="square" lIns="0" tIns="0" rIns="0" bIns="0" anchor="t">
             <a:spAutoFit/>
           </a:bodyPr>
           <a:lstStyle/>
@@ -21155,7 +21509,7 @@
           <a:noFill/>
         </p:spPr>
         <p:txBody>
-          <a:bodyPr wrap="square" anchor="t" lIns="0" rIns="0" tIns="0" bIns="0">
+          <a:bodyPr wrap="square" lIns="0" tIns="0" rIns="0" bIns="0" anchor="t">
             <a:spAutoFit/>
           </a:bodyPr>
           <a:lstStyle/>
@@ -21194,7 +21548,7 @@
           <a:noFill/>
         </p:spPr>
         <p:txBody>
-          <a:bodyPr wrap="square" anchor="t" lIns="0" rIns="0" tIns="0" bIns="0">
+          <a:bodyPr wrap="square" lIns="0" tIns="0" rIns="0" bIns="0" anchor="t">
             <a:spAutoFit/>
           </a:bodyPr>
           <a:lstStyle/>
@@ -21233,7 +21587,7 @@
           <a:noFill/>
         </p:spPr>
         <p:txBody>
-          <a:bodyPr wrap="square" anchor="t" lIns="0" rIns="0" tIns="0" bIns="0">
+          <a:bodyPr wrap="square" lIns="0" tIns="0" rIns="0" bIns="0" anchor="t">
             <a:spAutoFit/>
           </a:bodyPr>
           <a:lstStyle/>
@@ -21300,6 +21654,7 @@
           <a:lstStyle/>
           <a:p>
             <a:pPr algn="ctr"/>
+            <a:endParaRPr/>
           </a:p>
         </p:txBody>
       </p:sp>
@@ -21320,7 +21675,7 @@
           <a:noFill/>
         </p:spPr>
         <p:txBody>
-          <a:bodyPr wrap="square" anchor="t" lIns="0" rIns="0" tIns="0" bIns="0">
+          <a:bodyPr wrap="square" lIns="0" tIns="0" rIns="0" bIns="0" anchor="t">
             <a:spAutoFit/>
           </a:bodyPr>
           <a:lstStyle/>
@@ -21359,7 +21714,7 @@
           <a:noFill/>
         </p:spPr>
         <p:txBody>
-          <a:bodyPr wrap="square" anchor="t" lIns="0" rIns="0" tIns="0" bIns="0">
+          <a:bodyPr wrap="square" lIns="0" tIns="0" rIns="0" bIns="0" anchor="t">
             <a:spAutoFit/>
           </a:bodyPr>
           <a:lstStyle/>
@@ -21398,7 +21753,7 @@
           <a:noFill/>
         </p:spPr>
         <p:txBody>
-          <a:bodyPr wrap="square" anchor="t" lIns="0" rIns="0" tIns="0" bIns="0">
+          <a:bodyPr wrap="square" lIns="0" tIns="0" rIns="0" bIns="0" anchor="t">
             <a:spAutoFit/>
           </a:bodyPr>
           <a:lstStyle/>
@@ -21437,7 +21792,7 @@
           <a:noFill/>
         </p:spPr>
         <p:txBody>
-          <a:bodyPr wrap="square" anchor="t" lIns="0" rIns="0" tIns="0" bIns="0">
+          <a:bodyPr wrap="square" lIns="0" tIns="0" rIns="0" bIns="0" anchor="t">
             <a:spAutoFit/>
           </a:bodyPr>
           <a:lstStyle/>
@@ -21504,6 +21859,7 @@
           <a:lstStyle/>
           <a:p>
             <a:pPr algn="ctr"/>
+            <a:endParaRPr/>
           </a:p>
         </p:txBody>
       </p:sp>
@@ -21524,7 +21880,7 @@
           <a:noFill/>
         </p:spPr>
         <p:txBody>
-          <a:bodyPr wrap="square" anchor="t" lIns="0" rIns="0" tIns="0" bIns="0">
+          <a:bodyPr wrap="square" lIns="0" tIns="0" rIns="0" bIns="0" anchor="t">
             <a:spAutoFit/>
           </a:bodyPr>
           <a:lstStyle/>
@@ -21563,7 +21919,7 @@
           <a:noFill/>
         </p:spPr>
         <p:txBody>
-          <a:bodyPr wrap="square" anchor="t" lIns="0" rIns="0" tIns="0" bIns="0">
+          <a:bodyPr wrap="square" lIns="0" tIns="0" rIns="0" bIns="0" anchor="t">
             <a:spAutoFit/>
           </a:bodyPr>
           <a:lstStyle/>
@@ -21602,7 +21958,7 @@
           <a:noFill/>
         </p:spPr>
         <p:txBody>
-          <a:bodyPr wrap="square" anchor="t" lIns="0" rIns="0" tIns="0" bIns="0">
+          <a:bodyPr wrap="square" lIns="0" tIns="0" rIns="0" bIns="0" anchor="t">
             <a:spAutoFit/>
           </a:bodyPr>
           <a:lstStyle/>
@@ -21641,7 +21997,7 @@
           <a:noFill/>
         </p:spPr>
         <p:txBody>
-          <a:bodyPr wrap="square" anchor="t" lIns="0" rIns="0" tIns="0" bIns="0">
+          <a:bodyPr wrap="square" lIns="0" tIns="0" rIns="0" bIns="0" anchor="t">
             <a:spAutoFit/>
           </a:bodyPr>
           <a:lstStyle/>
@@ -21702,7 +22058,7 @@
           </a:fontRef>
         </p:style>
         <p:txBody>
-          <a:bodyPr rtlCol="0" anchor="ctr" wrap="square" lIns="109728" rIns="109728" tIns="54864" bIns="54864"/>
+          <a:bodyPr wrap="square" lIns="109728" tIns="54864" rIns="109728" bIns="54864" rtlCol="0" anchor="ctr"/>
           <a:lstStyle/>
           <a:p>
             <a:pPr algn="ctr">
